--- a/docs/ibaraki-kouseihogo/基本財産運用検討会_説明資料案_2026-09.pptx
+++ b/docs/ibaraki-kouseihogo/基本財産運用検討会_説明資料案_2026-09.pptx
@@ -4140,9 +4140,33 @@
           </a:ln>
         </p:spPr>
       </p:sp>
-      <p:sp>
-        <p:nvSpPr>
-          <p:cNvPr id="4" name="Text 2"/>
+      <p:pic>
+        <p:nvPicPr>
+          <p:cNvPr id="4" name="Image 0" descr="preencoded.png">    </p:cNvPr>
+          <p:cNvPicPr>
+            <a:picLocks noChangeAspect="1"/>
+          </p:cNvPicPr>
+          <p:nvPr/>
+        </p:nvPicPr>
+        <p:blipFill>
+          <a:blip r:embed="rId1"/>
+          <a:stretch>
+            <a:fillRect/>
+          </a:stretch>
+        </p:blipFill>
+        <p:spPr>
+          <a:xfrm>
+            <a:off x="548640" y="411480"/>
+            <a:ext cx="731520" cy="859536"/>
+          </a:xfrm>
+          <a:prstGeom prst="rect">
+            <a:avLst/>
+          </a:prstGeom>
+        </p:spPr>
+      </p:pic>
+      <p:sp>
+        <p:nvSpPr>
+          <p:cNvPr id="5" name="Text 2"/>
           <p:cNvSpPr txBox="1"/>
           <p:nvPr/>
         </p:nvSpPr>
@@ -4183,7 +4207,7 @@
       </p:sp>
       <p:sp>
         <p:nvSpPr>
-          <p:cNvPr id="5" name="Text 3"/>
+          <p:cNvPr id="6" name="Text 3"/>
           <p:cNvSpPr txBox="1"/>
           <p:nvPr/>
         </p:nvSpPr>
@@ -4224,7 +4248,7 @@
       </p:sp>
       <p:sp>
         <p:nvSpPr>
-          <p:cNvPr id="6" name="Text 4"/>
+          <p:cNvPr id="7" name="Text 4"/>
           <p:cNvSpPr txBox="1"/>
           <p:nvPr/>
         </p:nvSpPr>
@@ -4265,7 +4289,7 @@
       </p:sp>
       <p:sp>
         <p:nvSpPr>
-          <p:cNvPr id="7" name="Text 5"/>
+          <p:cNvPr id="8" name="Text 5"/>
           <p:cNvSpPr txBox="1"/>
           <p:nvPr/>
         </p:nvSpPr>
@@ -4306,7 +4330,7 @@
       </p:sp>
       <p:sp>
         <p:nvSpPr>
-          <p:cNvPr id="8" name="Text 6"/>
+          <p:cNvPr id="9" name="Text 6"/>
           <p:cNvSpPr txBox="1"/>
           <p:nvPr/>
         </p:nvSpPr>
@@ -4347,7 +4371,7 @@
       </p:sp>
       <p:sp>
         <p:nvSpPr>
-          <p:cNvPr id="9" name="Text 7"/>
+          <p:cNvPr id="10" name="Text 7"/>
           <p:cNvSpPr txBox="1"/>
           <p:nvPr/>
         </p:nvSpPr>
@@ -4418,16 +4442,40 @@
           <a:chExt cx="0" cy="0"/>
         </a:xfrm>
       </p:grpSpPr>
-      <p:sp>
-        <p:nvSpPr>
-          <p:cNvPr id="2" name="Text 0"/>
+      <p:pic>
+        <p:nvPicPr>
+          <p:cNvPr id="2" name="Image 0" descr="preencoded.png">    </p:cNvPr>
+          <p:cNvPicPr>
+            <a:picLocks noChangeAspect="1"/>
+          </p:cNvPicPr>
+          <p:nvPr/>
+        </p:nvPicPr>
+        <p:blipFill>
+          <a:blip r:embed="rId1"/>
+          <a:stretch>
+            <a:fillRect/>
+          </a:stretch>
+        </p:blipFill>
+        <p:spPr>
+          <a:xfrm>
+            <a:off x="8211312" y="201168"/>
+            <a:ext cx="457200" cy="539496"/>
+          </a:xfrm>
+          <a:prstGeom prst="rect">
+            <a:avLst/>
+          </a:prstGeom>
+        </p:spPr>
+      </p:pic>
+      <p:sp>
+        <p:nvSpPr>
+          <p:cNvPr id="3" name="Text 0"/>
           <p:cNvSpPr txBox="1"/>
           <p:nvPr/>
         </p:nvSpPr>
         <p:spPr>
           <a:xfrm>
             <a:off x="457200" y="274320"/>
-            <a:ext cx="8229600" cy="548640"/>
+            <a:ext cx="7680960" cy="548640"/>
           </a:xfrm>
           <a:prstGeom prst="rect">
             <a:avLst/>
@@ -4461,7 +4509,7 @@
       </p:sp>
       <p:sp>
         <p:nvSpPr>
-          <p:cNvPr id="3" name="Text 1"/>
+          <p:cNvPr id="4" name="Text 1"/>
           <p:cNvSpPr txBox="1"/>
           <p:nvPr/>
         </p:nvSpPr>
@@ -4502,7 +4550,7 @@
       </p:sp>
       <p:sp>
         <p:nvSpPr>
-          <p:cNvPr id="4" name="Shape 2"/>
+          <p:cNvPr id="5" name="Shape 2"/>
           <p:cNvSpPr/>
           <p:nvPr/>
         </p:nvSpPr>
@@ -4525,7 +4573,7 @@
       </p:sp>
       <p:sp>
         <p:nvSpPr>
-          <p:cNvPr id="5" name="Shape 3"/>
+          <p:cNvPr id="6" name="Shape 3"/>
           <p:cNvSpPr/>
           <p:nvPr/>
         </p:nvSpPr>
@@ -4550,7 +4598,7 @@
       </p:sp>
       <p:sp>
         <p:nvSpPr>
-          <p:cNvPr id="6" name="Text 4"/>
+          <p:cNvPr id="7" name="Text 4"/>
           <p:cNvSpPr txBox="1"/>
           <p:nvPr/>
         </p:nvSpPr>
@@ -4591,7 +4639,7 @@
       </p:sp>
       <p:sp>
         <p:nvSpPr>
-          <p:cNvPr id="7" name="Text 5"/>
+          <p:cNvPr id="8" name="Text 5"/>
           <p:cNvSpPr txBox="1"/>
           <p:nvPr/>
         </p:nvSpPr>
@@ -4632,7 +4680,7 @@
       </p:sp>
       <p:sp>
         <p:nvSpPr>
-          <p:cNvPr id="8" name="Shape 6"/>
+          <p:cNvPr id="9" name="Shape 6"/>
           <p:cNvSpPr/>
           <p:nvPr/>
         </p:nvSpPr>
@@ -4659,7 +4707,7 @@
       </p:sp>
       <p:sp>
         <p:nvSpPr>
-          <p:cNvPr id="9" name="Text 7"/>
+          <p:cNvPr id="10" name="Text 7"/>
           <p:cNvSpPr txBox="1"/>
           <p:nvPr/>
         </p:nvSpPr>
@@ -4717,7 +4765,7 @@
       </p:sp>
       <p:sp>
         <p:nvSpPr>
-          <p:cNvPr id="10" name="Text 8"/>
+          <p:cNvPr id="11" name="Text 8"/>
           <p:cNvSpPr txBox="1"/>
           <p:nvPr/>
         </p:nvSpPr>
@@ -4758,7 +4806,7 @@
       </p:sp>
       <p:sp>
         <p:nvSpPr>
-          <p:cNvPr id="11" name="Shape 9"/>
+          <p:cNvPr id="12" name="Shape 9"/>
           <p:cNvSpPr/>
           <p:nvPr/>
         </p:nvSpPr>
@@ -4783,7 +4831,7 @@
       </p:sp>
       <p:sp>
         <p:nvSpPr>
-          <p:cNvPr id="12" name="Text 10"/>
+          <p:cNvPr id="13" name="Text 10"/>
           <p:cNvSpPr txBox="1"/>
           <p:nvPr/>
         </p:nvSpPr>
@@ -4824,7 +4872,7 @@
       </p:sp>
       <p:sp>
         <p:nvSpPr>
-          <p:cNvPr id="13" name="Text 11"/>
+          <p:cNvPr id="14" name="Text 11"/>
           <p:cNvSpPr txBox="1"/>
           <p:nvPr/>
         </p:nvSpPr>
@@ -4865,7 +4913,7 @@
       </p:sp>
       <p:sp>
         <p:nvSpPr>
-          <p:cNvPr id="14" name="Shape 12"/>
+          <p:cNvPr id="15" name="Shape 12"/>
           <p:cNvSpPr/>
           <p:nvPr/>
         </p:nvSpPr>
@@ -4892,7 +4940,7 @@
       </p:sp>
       <p:sp>
         <p:nvSpPr>
-          <p:cNvPr id="15" name="Text 13"/>
+          <p:cNvPr id="16" name="Text 13"/>
           <p:cNvSpPr txBox="1"/>
           <p:nvPr/>
         </p:nvSpPr>
@@ -4950,7 +4998,7 @@
       </p:sp>
       <p:sp>
         <p:nvSpPr>
-          <p:cNvPr id="16" name="Text 14"/>
+          <p:cNvPr id="17" name="Text 14"/>
           <p:cNvSpPr txBox="1"/>
           <p:nvPr/>
         </p:nvSpPr>
@@ -4991,7 +5039,7 @@
       </p:sp>
       <p:sp>
         <p:nvSpPr>
-          <p:cNvPr id="17" name="Shape 15"/>
+          <p:cNvPr id="18" name="Shape 15"/>
           <p:cNvSpPr/>
           <p:nvPr/>
         </p:nvSpPr>
@@ -5016,7 +5064,7 @@
       </p:sp>
       <p:sp>
         <p:nvSpPr>
-          <p:cNvPr id="18" name="Text 16"/>
+          <p:cNvPr id="19" name="Text 16"/>
           <p:cNvSpPr txBox="1"/>
           <p:nvPr/>
         </p:nvSpPr>
@@ -5057,7 +5105,7 @@
       </p:sp>
       <p:sp>
         <p:nvSpPr>
-          <p:cNvPr id="19" name="Text 17"/>
+          <p:cNvPr id="20" name="Text 17"/>
           <p:cNvSpPr txBox="1"/>
           <p:nvPr/>
         </p:nvSpPr>
@@ -5098,7 +5146,7 @@
       </p:sp>
       <p:sp>
         <p:nvSpPr>
-          <p:cNvPr id="20" name="Shape 18"/>
+          <p:cNvPr id="21" name="Shape 18"/>
           <p:cNvSpPr/>
           <p:nvPr/>
         </p:nvSpPr>
@@ -5125,7 +5173,7 @@
       </p:sp>
       <p:sp>
         <p:nvSpPr>
-          <p:cNvPr id="21" name="Text 19"/>
+          <p:cNvPr id="22" name="Text 19"/>
           <p:cNvSpPr txBox="1"/>
           <p:nvPr/>
         </p:nvSpPr>
@@ -5183,7 +5231,7 @@
       </p:sp>
       <p:sp>
         <p:nvSpPr>
-          <p:cNvPr id="22" name="Text 20"/>
+          <p:cNvPr id="23" name="Text 20"/>
           <p:cNvSpPr txBox="1"/>
           <p:nvPr/>
         </p:nvSpPr>
@@ -5224,7 +5272,7 @@
       </p:sp>
       <p:sp>
         <p:nvSpPr>
-          <p:cNvPr id="23" name="Shape 21"/>
+          <p:cNvPr id="24" name="Shape 21"/>
           <p:cNvSpPr/>
           <p:nvPr/>
         </p:nvSpPr>
@@ -5249,7 +5297,7 @@
       </p:sp>
       <p:sp>
         <p:nvSpPr>
-          <p:cNvPr id="24" name="Text 22"/>
+          <p:cNvPr id="25" name="Text 22"/>
           <p:cNvSpPr txBox="1"/>
           <p:nvPr/>
         </p:nvSpPr>
@@ -5290,7 +5338,7 @@
       </p:sp>
       <p:sp>
         <p:nvSpPr>
-          <p:cNvPr id="25" name="Text 23"/>
+          <p:cNvPr id="26" name="Text 23"/>
           <p:cNvSpPr txBox="1"/>
           <p:nvPr/>
         </p:nvSpPr>
@@ -5331,7 +5379,7 @@
       </p:sp>
       <p:sp>
         <p:nvSpPr>
-          <p:cNvPr id="26" name="Shape 24"/>
+          <p:cNvPr id="27" name="Shape 24"/>
           <p:cNvSpPr/>
           <p:nvPr/>
         </p:nvSpPr>
@@ -5358,7 +5406,7 @@
       </p:sp>
       <p:sp>
         <p:nvSpPr>
-          <p:cNvPr id="27" name="Text 25"/>
+          <p:cNvPr id="28" name="Text 25"/>
           <p:cNvSpPr txBox="1"/>
           <p:nvPr/>
         </p:nvSpPr>
@@ -5416,7 +5464,7 @@
       </p:sp>
       <p:sp>
         <p:nvSpPr>
-          <p:cNvPr id="28" name="Text 26"/>
+          <p:cNvPr id="29" name="Text 26"/>
           <p:cNvSpPr txBox="1"/>
           <p:nvPr/>
         </p:nvSpPr>
@@ -5457,7 +5505,7 @@
       </p:sp>
       <p:sp>
         <p:nvSpPr>
-          <p:cNvPr id="29" name="Shape 27"/>
+          <p:cNvPr id="30" name="Shape 27"/>
           <p:cNvSpPr/>
           <p:nvPr/>
         </p:nvSpPr>
@@ -5482,7 +5530,7 @@
       </p:sp>
       <p:sp>
         <p:nvSpPr>
-          <p:cNvPr id="30" name="Text 28"/>
+          <p:cNvPr id="31" name="Text 28"/>
           <p:cNvSpPr txBox="1"/>
           <p:nvPr/>
         </p:nvSpPr>
@@ -5523,7 +5571,7 @@
       </p:sp>
       <p:sp>
         <p:nvSpPr>
-          <p:cNvPr id="31" name="Text 29"/>
+          <p:cNvPr id="32" name="Text 29"/>
           <p:cNvSpPr txBox="1"/>
           <p:nvPr/>
         </p:nvSpPr>
@@ -5564,7 +5612,7 @@
       </p:sp>
       <p:sp>
         <p:nvSpPr>
-          <p:cNvPr id="32" name="Shape 30"/>
+          <p:cNvPr id="33" name="Shape 30"/>
           <p:cNvSpPr/>
           <p:nvPr/>
         </p:nvSpPr>
@@ -5591,7 +5639,7 @@
       </p:sp>
       <p:sp>
         <p:nvSpPr>
-          <p:cNvPr id="33" name="Text 31"/>
+          <p:cNvPr id="34" name="Text 31"/>
           <p:cNvSpPr txBox="1"/>
           <p:nvPr/>
         </p:nvSpPr>
@@ -5649,7 +5697,7 @@
       </p:sp>
       <p:sp>
         <p:nvSpPr>
-          <p:cNvPr id="34" name="Text 32"/>
+          <p:cNvPr id="35" name="Text 32"/>
           <p:cNvSpPr txBox="1"/>
           <p:nvPr/>
         </p:nvSpPr>
@@ -5690,7 +5738,7 @@
       </p:sp>
       <p:sp>
         <p:nvSpPr>
-          <p:cNvPr id="35" name="Shape 33"/>
+          <p:cNvPr id="36" name="Shape 33"/>
           <p:cNvSpPr/>
           <p:nvPr/>
         </p:nvSpPr>
@@ -5717,7 +5765,7 @@
       </p:sp>
       <p:sp>
         <p:nvSpPr>
-          <p:cNvPr id="36" name="Text 34"/>
+          <p:cNvPr id="37" name="Text 34"/>
           <p:cNvSpPr txBox="1"/>
           <p:nvPr/>
         </p:nvSpPr>
@@ -5758,7 +5806,7 @@
       </p:sp>
       <p:sp>
         <p:nvSpPr>
-          <p:cNvPr id="37" name="Text 35"/>
+          <p:cNvPr id="38" name="Text 35"/>
           <p:cNvSpPr txBox="1"/>
           <p:nvPr/>
         </p:nvSpPr>
@@ -5799,7 +5847,7 @@
       </p:sp>
       <p:sp>
         <p:nvSpPr>
-          <p:cNvPr id="38" name="Text 36"/>
+          <p:cNvPr id="39" name="Text 36"/>
           <p:cNvSpPr txBox="1"/>
           <p:nvPr/>
         </p:nvSpPr>
@@ -5870,16 +5918,40 @@
           <a:chExt cx="0" cy="0"/>
         </a:xfrm>
       </p:grpSpPr>
-      <p:sp>
-        <p:nvSpPr>
-          <p:cNvPr id="2" name="Text 0"/>
+      <p:pic>
+        <p:nvPicPr>
+          <p:cNvPr id="2" name="Image 0" descr="preencoded.png">    </p:cNvPr>
+          <p:cNvPicPr>
+            <a:picLocks noChangeAspect="1"/>
+          </p:cNvPicPr>
+          <p:nvPr/>
+        </p:nvPicPr>
+        <p:blipFill>
+          <a:blip r:embed="rId1"/>
+          <a:stretch>
+            <a:fillRect/>
+          </a:stretch>
+        </p:blipFill>
+        <p:spPr>
+          <a:xfrm>
+            <a:off x="8211312" y="201168"/>
+            <a:ext cx="457200" cy="539496"/>
+          </a:xfrm>
+          <a:prstGeom prst="rect">
+            <a:avLst/>
+          </a:prstGeom>
+        </p:spPr>
+      </p:pic>
+      <p:sp>
+        <p:nvSpPr>
+          <p:cNvPr id="3" name="Text 0"/>
           <p:cNvSpPr txBox="1"/>
           <p:nvPr/>
         </p:nvSpPr>
         <p:spPr>
           <a:xfrm>
             <a:off x="457200" y="274320"/>
-            <a:ext cx="8229600" cy="548640"/>
+            <a:ext cx="7680960" cy="548640"/>
           </a:xfrm>
           <a:prstGeom prst="rect">
             <a:avLst/>
@@ -5913,7 +5985,7 @@
       </p:sp>
       <p:sp>
         <p:nvSpPr>
-          <p:cNvPr id="3" name="Text 1"/>
+          <p:cNvPr id="4" name="Text 1"/>
           <p:cNvSpPr txBox="1"/>
           <p:nvPr/>
         </p:nvSpPr>
@@ -5954,7 +6026,7 @@
       </p:sp>
       <p:graphicFrame>
         <p:nvGraphicFramePr>
-          <p:cNvPr id="4" name="Chart 0" descr=""/>
+          <p:cNvPr id="5" name="Chart 0" descr=""/>
           <p:cNvGraphicFramePr/>
           <p:nvPr/>
         </p:nvGraphicFramePr>
@@ -5964,7 +6036,7 @@
         </p:xfrm>
         <a:graphic xmlns:a="http://schemas.openxmlformats.org/drawingml/2006/main">
           <a:graphicData uri="http://schemas.openxmlformats.org/drawingml/2006/chart">
-            <c:chart xmlns:c="http://schemas.openxmlformats.org/drawingml/2006/chart" r:id="rId1"/>
+            <c:chart xmlns:c="http://schemas.openxmlformats.org/drawingml/2006/chart" r:id="rId2"/>
           </a:graphicData>
         </a:graphic>
       </p:graphicFrame>
@@ -7031,7 +7103,7 @@
       </p:graphicFrame>
       <p:sp>
         <p:nvSpPr>
-          <p:cNvPr id="6" name="Shape 2"/>
+          <p:cNvPr id="7" name="Shape 2"/>
           <p:cNvSpPr/>
           <p:nvPr/>
         </p:nvSpPr>
@@ -7058,7 +7130,7 @@
       </p:sp>
       <p:sp>
         <p:nvSpPr>
-          <p:cNvPr id="7" name="Text 3"/>
+          <p:cNvPr id="8" name="Text 3"/>
           <p:cNvSpPr txBox="1"/>
           <p:nvPr/>
         </p:nvSpPr>
@@ -7099,7 +7171,7 @@
       </p:sp>
       <p:sp>
         <p:nvSpPr>
-          <p:cNvPr id="8" name="Text 4"/>
+          <p:cNvPr id="9" name="Text 4"/>
           <p:cNvSpPr txBox="1"/>
           <p:nvPr/>
         </p:nvSpPr>
@@ -7186,7 +7258,7 @@
       </p:sp>
       <p:sp>
         <p:nvSpPr>
-          <p:cNvPr id="9" name="Text 5"/>
+          <p:cNvPr id="10" name="Text 5"/>
           <p:cNvSpPr txBox="1"/>
           <p:nvPr/>
         </p:nvSpPr>
@@ -7227,7 +7299,7 @@
       </p:sp>
       <p:sp>
         <p:nvSpPr>
-          <p:cNvPr id="10" name="Text 6"/>
+          <p:cNvPr id="11" name="Text 6"/>
           <p:cNvSpPr txBox="1"/>
           <p:nvPr/>
         </p:nvSpPr>
@@ -7298,16 +7370,40 @@
           <a:chExt cx="0" cy="0"/>
         </a:xfrm>
       </p:grpSpPr>
-      <p:sp>
-        <p:nvSpPr>
-          <p:cNvPr id="2" name="Text 0"/>
+      <p:pic>
+        <p:nvPicPr>
+          <p:cNvPr id="2" name="Image 0" descr="preencoded.png">    </p:cNvPr>
+          <p:cNvPicPr>
+            <a:picLocks noChangeAspect="1"/>
+          </p:cNvPicPr>
+          <p:nvPr/>
+        </p:nvPicPr>
+        <p:blipFill>
+          <a:blip r:embed="rId1"/>
+          <a:stretch>
+            <a:fillRect/>
+          </a:stretch>
+        </p:blipFill>
+        <p:spPr>
+          <a:xfrm>
+            <a:off x="8211312" y="201168"/>
+            <a:ext cx="457200" cy="539496"/>
+          </a:xfrm>
+          <a:prstGeom prst="rect">
+            <a:avLst/>
+          </a:prstGeom>
+        </p:spPr>
+      </p:pic>
+      <p:sp>
+        <p:nvSpPr>
+          <p:cNvPr id="3" name="Text 0"/>
           <p:cNvSpPr txBox="1"/>
           <p:nvPr/>
         </p:nvSpPr>
         <p:spPr>
           <a:xfrm>
             <a:off x="457200" y="274320"/>
-            <a:ext cx="8229600" cy="548640"/>
+            <a:ext cx="7680960" cy="548640"/>
           </a:xfrm>
           <a:prstGeom prst="rect">
             <a:avLst/>
@@ -7341,7 +7437,7 @@
       </p:sp>
       <p:sp>
         <p:nvSpPr>
-          <p:cNvPr id="3" name="Text 1"/>
+          <p:cNvPr id="4" name="Text 1"/>
           <p:cNvSpPr txBox="1"/>
           <p:nvPr/>
         </p:nvSpPr>
@@ -7382,7 +7478,7 @@
       </p:sp>
       <p:sp>
         <p:nvSpPr>
-          <p:cNvPr id="4" name="Shape 2"/>
+          <p:cNvPr id="5" name="Shape 2"/>
           <p:cNvSpPr/>
           <p:nvPr/>
         </p:nvSpPr>
@@ -7409,7 +7505,7 @@
       </p:sp>
       <p:sp>
         <p:nvSpPr>
-          <p:cNvPr id="5" name="Text 3"/>
+          <p:cNvPr id="6" name="Text 3"/>
           <p:cNvSpPr txBox="1"/>
           <p:nvPr/>
         </p:nvSpPr>
@@ -7450,7 +7546,7 @@
       </p:sp>
       <p:sp>
         <p:nvSpPr>
-          <p:cNvPr id="6" name="Text 4"/>
+          <p:cNvPr id="7" name="Text 4"/>
           <p:cNvSpPr txBox="1"/>
           <p:nvPr/>
         </p:nvSpPr>
@@ -7491,7 +7587,7 @@
       </p:sp>
       <p:sp>
         <p:nvSpPr>
-          <p:cNvPr id="7" name="Text 5"/>
+          <p:cNvPr id="8" name="Text 5"/>
           <p:cNvSpPr txBox="1"/>
           <p:nvPr/>
         </p:nvSpPr>
@@ -7532,7 +7628,7 @@
       </p:sp>
       <p:sp>
         <p:nvSpPr>
-          <p:cNvPr id="8" name="Shape 6"/>
+          <p:cNvPr id="9" name="Shape 6"/>
           <p:cNvSpPr/>
           <p:nvPr/>
         </p:nvSpPr>
@@ -7559,7 +7655,7 @@
       </p:sp>
       <p:sp>
         <p:nvSpPr>
-          <p:cNvPr id="9" name="Text 7"/>
+          <p:cNvPr id="10" name="Text 7"/>
           <p:cNvSpPr txBox="1"/>
           <p:nvPr/>
         </p:nvSpPr>
@@ -7600,7 +7696,7 @@
       </p:sp>
       <p:sp>
         <p:nvSpPr>
-          <p:cNvPr id="10" name="Text 8"/>
+          <p:cNvPr id="11" name="Text 8"/>
           <p:cNvSpPr txBox="1"/>
           <p:nvPr/>
         </p:nvSpPr>
@@ -7641,7 +7737,7 @@
       </p:sp>
       <p:sp>
         <p:nvSpPr>
-          <p:cNvPr id="11" name="Text 9"/>
+          <p:cNvPr id="12" name="Text 9"/>
           <p:cNvSpPr txBox="1"/>
           <p:nvPr/>
         </p:nvSpPr>
@@ -7682,7 +7778,7 @@
       </p:sp>
       <p:sp>
         <p:nvSpPr>
-          <p:cNvPr id="12" name="Shape 10"/>
+          <p:cNvPr id="13" name="Shape 10"/>
           <p:cNvSpPr/>
           <p:nvPr/>
         </p:nvSpPr>
@@ -7709,7 +7805,7 @@
       </p:sp>
       <p:sp>
         <p:nvSpPr>
-          <p:cNvPr id="13" name="Text 11"/>
+          <p:cNvPr id="14" name="Text 11"/>
           <p:cNvSpPr txBox="1"/>
           <p:nvPr/>
         </p:nvSpPr>
@@ -7750,7 +7846,7 @@
       </p:sp>
       <p:sp>
         <p:nvSpPr>
-          <p:cNvPr id="14" name="Text 12"/>
+          <p:cNvPr id="15" name="Text 12"/>
           <p:cNvSpPr txBox="1"/>
           <p:nvPr/>
         </p:nvSpPr>
@@ -7791,7 +7887,7 @@
       </p:sp>
       <p:sp>
         <p:nvSpPr>
-          <p:cNvPr id="15" name="Text 13"/>
+          <p:cNvPr id="16" name="Text 13"/>
           <p:cNvSpPr txBox="1"/>
           <p:nvPr/>
         </p:nvSpPr>
@@ -7832,7 +7928,7 @@
       </p:sp>
       <p:sp>
         <p:nvSpPr>
-          <p:cNvPr id="16" name="Shape 14"/>
+          <p:cNvPr id="17" name="Shape 14"/>
           <p:cNvSpPr/>
           <p:nvPr/>
         </p:nvSpPr>
@@ -7859,7 +7955,7 @@
       </p:sp>
       <p:sp>
         <p:nvSpPr>
-          <p:cNvPr id="17" name="Text 15"/>
+          <p:cNvPr id="18" name="Text 15"/>
           <p:cNvSpPr txBox="1"/>
           <p:nvPr/>
         </p:nvSpPr>
@@ -7900,7 +7996,7 @@
       </p:sp>
       <p:sp>
         <p:nvSpPr>
-          <p:cNvPr id="18" name="Text 16"/>
+          <p:cNvPr id="19" name="Text 16"/>
           <p:cNvSpPr txBox="1"/>
           <p:nvPr/>
         </p:nvSpPr>
@@ -7941,7 +8037,7 @@
       </p:sp>
       <p:sp>
         <p:nvSpPr>
-          <p:cNvPr id="19" name="Text 17"/>
+          <p:cNvPr id="20" name="Text 17"/>
           <p:cNvSpPr txBox="1"/>
           <p:nvPr/>
         </p:nvSpPr>
@@ -7982,7 +8078,7 @@
       </p:sp>
       <p:sp>
         <p:nvSpPr>
-          <p:cNvPr id="20" name="Shape 18"/>
+          <p:cNvPr id="21" name="Shape 18"/>
           <p:cNvSpPr/>
           <p:nvPr/>
         </p:nvSpPr>
@@ -8009,7 +8105,7 @@
       </p:sp>
       <p:sp>
         <p:nvSpPr>
-          <p:cNvPr id="21" name="Text 19"/>
+          <p:cNvPr id="22" name="Text 19"/>
           <p:cNvSpPr txBox="1"/>
           <p:nvPr/>
         </p:nvSpPr>
@@ -8050,7 +8146,7 @@
       </p:sp>
       <p:sp>
         <p:nvSpPr>
-          <p:cNvPr id="22" name="Text 20"/>
+          <p:cNvPr id="23" name="Text 20"/>
           <p:cNvSpPr txBox="1"/>
           <p:nvPr/>
         </p:nvSpPr>
@@ -8228,7 +8324,7 @@
       </p:sp>
       <p:sp>
         <p:nvSpPr>
-          <p:cNvPr id="23" name="Text 21"/>
+          <p:cNvPr id="24" name="Text 21"/>
           <p:cNvSpPr txBox="1"/>
           <p:nvPr/>
         </p:nvSpPr>
@@ -8269,7 +8365,7 @@
       </p:sp>
       <p:sp>
         <p:nvSpPr>
-          <p:cNvPr id="24" name="Text 22"/>
+          <p:cNvPr id="25" name="Text 22"/>
           <p:cNvSpPr txBox="1"/>
           <p:nvPr/>
         </p:nvSpPr>
@@ -8310,7 +8406,7 @@
       </p:sp>
       <p:sp>
         <p:nvSpPr>
-          <p:cNvPr id="25" name="Text 23"/>
+          <p:cNvPr id="26" name="Text 23"/>
           <p:cNvSpPr txBox="1"/>
           <p:nvPr/>
         </p:nvSpPr>
@@ -8381,16 +8477,40 @@
           <a:chExt cx="0" cy="0"/>
         </a:xfrm>
       </p:grpSpPr>
-      <p:sp>
-        <p:nvSpPr>
-          <p:cNvPr id="2" name="Text 0"/>
+      <p:pic>
+        <p:nvPicPr>
+          <p:cNvPr id="2" name="Image 0" descr="preencoded.png">    </p:cNvPr>
+          <p:cNvPicPr>
+            <a:picLocks noChangeAspect="1"/>
+          </p:cNvPicPr>
+          <p:nvPr/>
+        </p:nvPicPr>
+        <p:blipFill>
+          <a:blip r:embed="rId1"/>
+          <a:stretch>
+            <a:fillRect/>
+          </a:stretch>
+        </p:blipFill>
+        <p:spPr>
+          <a:xfrm>
+            <a:off x="8211312" y="201168"/>
+            <a:ext cx="457200" cy="539496"/>
+          </a:xfrm>
+          <a:prstGeom prst="rect">
+            <a:avLst/>
+          </a:prstGeom>
+        </p:spPr>
+      </p:pic>
+      <p:sp>
+        <p:nvSpPr>
+          <p:cNvPr id="3" name="Text 0"/>
           <p:cNvSpPr txBox="1"/>
           <p:nvPr/>
         </p:nvSpPr>
         <p:spPr>
           <a:xfrm>
             <a:off x="457200" y="274320"/>
-            <a:ext cx="8229600" cy="548640"/>
+            <a:ext cx="7680960" cy="548640"/>
           </a:xfrm>
           <a:prstGeom prst="rect">
             <a:avLst/>
@@ -8424,7 +8544,7 @@
       </p:sp>
       <p:sp>
         <p:nvSpPr>
-          <p:cNvPr id="3" name="Text 1"/>
+          <p:cNvPr id="4" name="Text 1"/>
           <p:cNvSpPr txBox="1"/>
           <p:nvPr/>
         </p:nvSpPr>
@@ -8465,7 +8585,7 @@
       </p:sp>
       <p:sp>
         <p:nvSpPr>
-          <p:cNvPr id="4" name="Shape 2"/>
+          <p:cNvPr id="5" name="Shape 2"/>
           <p:cNvSpPr/>
           <p:nvPr/>
         </p:nvSpPr>
@@ -8492,7 +8612,7 @@
       </p:sp>
       <p:sp>
         <p:nvSpPr>
-          <p:cNvPr id="5" name="Text 3"/>
+          <p:cNvPr id="6" name="Text 3"/>
           <p:cNvSpPr txBox="1"/>
           <p:nvPr/>
         </p:nvSpPr>
@@ -8533,7 +8653,7 @@
       </p:sp>
       <p:sp>
         <p:nvSpPr>
-          <p:cNvPr id="6" name="Text 4"/>
+          <p:cNvPr id="7" name="Text 4"/>
           <p:cNvSpPr txBox="1"/>
           <p:nvPr/>
         </p:nvSpPr>
@@ -8574,7 +8694,7 @@
       </p:sp>
       <p:sp>
         <p:nvSpPr>
-          <p:cNvPr id="7" name="Text 5"/>
+          <p:cNvPr id="8" name="Text 5"/>
           <p:cNvSpPr txBox="1"/>
           <p:nvPr/>
         </p:nvSpPr>
@@ -8615,7 +8735,7 @@
       </p:sp>
       <p:sp>
         <p:nvSpPr>
-          <p:cNvPr id="8" name="Shape 6"/>
+          <p:cNvPr id="9" name="Shape 6"/>
           <p:cNvSpPr/>
           <p:nvPr/>
         </p:nvSpPr>
@@ -8642,7 +8762,7 @@
       </p:sp>
       <p:sp>
         <p:nvSpPr>
-          <p:cNvPr id="9" name="Text 7"/>
+          <p:cNvPr id="10" name="Text 7"/>
           <p:cNvSpPr txBox="1"/>
           <p:nvPr/>
         </p:nvSpPr>
@@ -8683,7 +8803,7 @@
       </p:sp>
       <p:sp>
         <p:nvSpPr>
-          <p:cNvPr id="10" name="Text 8"/>
+          <p:cNvPr id="11" name="Text 8"/>
           <p:cNvSpPr txBox="1"/>
           <p:nvPr/>
         </p:nvSpPr>
@@ -8724,7 +8844,7 @@
       </p:sp>
       <p:sp>
         <p:nvSpPr>
-          <p:cNvPr id="11" name="Text 9"/>
+          <p:cNvPr id="12" name="Text 9"/>
           <p:cNvSpPr txBox="1"/>
           <p:nvPr/>
         </p:nvSpPr>
@@ -8765,7 +8885,7 @@
       </p:sp>
       <p:sp>
         <p:nvSpPr>
-          <p:cNvPr id="12" name="Shape 10"/>
+          <p:cNvPr id="13" name="Shape 10"/>
           <p:cNvSpPr/>
           <p:nvPr/>
         </p:nvSpPr>
@@ -8792,7 +8912,7 @@
       </p:sp>
       <p:sp>
         <p:nvSpPr>
-          <p:cNvPr id="13" name="Text 11"/>
+          <p:cNvPr id="14" name="Text 11"/>
           <p:cNvSpPr txBox="1"/>
           <p:nvPr/>
         </p:nvSpPr>
@@ -8833,7 +8953,7 @@
       </p:sp>
       <p:sp>
         <p:nvSpPr>
-          <p:cNvPr id="14" name="Text 12"/>
+          <p:cNvPr id="15" name="Text 12"/>
           <p:cNvSpPr txBox="1"/>
           <p:nvPr/>
         </p:nvSpPr>
@@ -8874,7 +8994,7 @@
       </p:sp>
       <p:sp>
         <p:nvSpPr>
-          <p:cNvPr id="15" name="Text 13"/>
+          <p:cNvPr id="16" name="Text 13"/>
           <p:cNvSpPr txBox="1"/>
           <p:nvPr/>
         </p:nvSpPr>
@@ -8915,7 +9035,7 @@
       </p:sp>
       <p:sp>
         <p:nvSpPr>
-          <p:cNvPr id="16" name="Shape 14"/>
+          <p:cNvPr id="17" name="Shape 14"/>
           <p:cNvSpPr/>
           <p:nvPr/>
         </p:nvSpPr>
@@ -8942,7 +9062,7 @@
       </p:sp>
       <p:sp>
         <p:nvSpPr>
-          <p:cNvPr id="17" name="Text 15"/>
+          <p:cNvPr id="18" name="Text 15"/>
           <p:cNvSpPr txBox="1"/>
           <p:nvPr/>
         </p:nvSpPr>
@@ -8983,7 +9103,7 @@
       </p:sp>
       <p:sp>
         <p:nvSpPr>
-          <p:cNvPr id="18" name="Text 16"/>
+          <p:cNvPr id="19" name="Text 16"/>
           <p:cNvSpPr txBox="1"/>
           <p:nvPr/>
         </p:nvSpPr>
@@ -9024,7 +9144,7 @@
       </p:sp>
       <p:sp>
         <p:nvSpPr>
-          <p:cNvPr id="19" name="Text 17"/>
+          <p:cNvPr id="20" name="Text 17"/>
           <p:cNvSpPr txBox="1"/>
           <p:nvPr/>
         </p:nvSpPr>
@@ -9065,7 +9185,7 @@
       </p:sp>
       <p:sp>
         <p:nvSpPr>
-          <p:cNvPr id="20" name="Shape 18"/>
+          <p:cNvPr id="21" name="Shape 18"/>
           <p:cNvSpPr/>
           <p:nvPr/>
         </p:nvSpPr>
@@ -9092,7 +9212,7 @@
       </p:sp>
       <p:sp>
         <p:nvSpPr>
-          <p:cNvPr id="21" name="Text 19"/>
+          <p:cNvPr id="22" name="Text 19"/>
           <p:cNvSpPr txBox="1"/>
           <p:nvPr/>
         </p:nvSpPr>
@@ -9133,7 +9253,7 @@
       </p:sp>
       <p:sp>
         <p:nvSpPr>
-          <p:cNvPr id="22" name="Text 20"/>
+          <p:cNvPr id="23" name="Text 20"/>
           <p:cNvSpPr txBox="1"/>
           <p:nvPr/>
         </p:nvSpPr>
@@ -9174,7 +9294,7 @@
       </p:sp>
       <p:sp>
         <p:nvSpPr>
-          <p:cNvPr id="23" name="Text 21"/>
+          <p:cNvPr id="24" name="Text 21"/>
           <p:cNvSpPr txBox="1"/>
           <p:nvPr/>
         </p:nvSpPr>
@@ -9215,7 +9335,7 @@
       </p:sp>
       <p:sp>
         <p:nvSpPr>
-          <p:cNvPr id="24" name="Shape 22"/>
+          <p:cNvPr id="25" name="Shape 22"/>
           <p:cNvSpPr/>
           <p:nvPr/>
         </p:nvSpPr>
@@ -9242,7 +9362,7 @@
       </p:sp>
       <p:sp>
         <p:nvSpPr>
-          <p:cNvPr id="25" name="Text 23"/>
+          <p:cNvPr id="26" name="Text 23"/>
           <p:cNvSpPr txBox="1"/>
           <p:nvPr/>
         </p:nvSpPr>
@@ -9283,7 +9403,7 @@
       </p:sp>
       <p:sp>
         <p:nvSpPr>
-          <p:cNvPr id="26" name="Text 24"/>
+          <p:cNvPr id="27" name="Text 24"/>
           <p:cNvSpPr txBox="1"/>
           <p:nvPr/>
         </p:nvSpPr>
@@ -9324,7 +9444,7 @@
       </p:sp>
       <p:sp>
         <p:nvSpPr>
-          <p:cNvPr id="27" name="Text 25"/>
+          <p:cNvPr id="28" name="Text 25"/>
           <p:cNvSpPr txBox="1"/>
           <p:nvPr/>
         </p:nvSpPr>
@@ -9365,7 +9485,7 @@
       </p:sp>
       <p:sp>
         <p:nvSpPr>
-          <p:cNvPr id="28" name="Shape 26"/>
+          <p:cNvPr id="29" name="Shape 26"/>
           <p:cNvSpPr/>
           <p:nvPr/>
         </p:nvSpPr>
@@ -9392,7 +9512,7 @@
       </p:sp>
       <p:sp>
         <p:nvSpPr>
-          <p:cNvPr id="29" name="Text 27"/>
+          <p:cNvPr id="30" name="Text 27"/>
           <p:cNvSpPr txBox="1"/>
           <p:nvPr/>
         </p:nvSpPr>
@@ -9458,7 +9578,7 @@
       </p:sp>
       <p:sp>
         <p:nvSpPr>
-          <p:cNvPr id="30" name="Text 28"/>
+          <p:cNvPr id="31" name="Text 28"/>
           <p:cNvSpPr txBox="1"/>
           <p:nvPr/>
         </p:nvSpPr>
@@ -9499,7 +9619,7 @@
       </p:sp>
       <p:sp>
         <p:nvSpPr>
-          <p:cNvPr id="31" name="Text 29"/>
+          <p:cNvPr id="32" name="Text 29"/>
           <p:cNvSpPr txBox="1"/>
           <p:nvPr/>
         </p:nvSpPr>
@@ -9570,16 +9690,40 @@
           <a:chExt cx="0" cy="0"/>
         </a:xfrm>
       </p:grpSpPr>
-      <p:sp>
-        <p:nvSpPr>
-          <p:cNvPr id="2" name="Text 0"/>
+      <p:pic>
+        <p:nvPicPr>
+          <p:cNvPr id="2" name="Image 0" descr="preencoded.png">    </p:cNvPr>
+          <p:cNvPicPr>
+            <a:picLocks noChangeAspect="1"/>
+          </p:cNvPicPr>
+          <p:nvPr/>
+        </p:nvPicPr>
+        <p:blipFill>
+          <a:blip r:embed="rId1"/>
+          <a:stretch>
+            <a:fillRect/>
+          </a:stretch>
+        </p:blipFill>
+        <p:spPr>
+          <a:xfrm>
+            <a:off x="8211312" y="201168"/>
+            <a:ext cx="457200" cy="539496"/>
+          </a:xfrm>
+          <a:prstGeom prst="rect">
+            <a:avLst/>
+          </a:prstGeom>
+        </p:spPr>
+      </p:pic>
+      <p:sp>
+        <p:nvSpPr>
+          <p:cNvPr id="3" name="Text 0"/>
           <p:cNvSpPr txBox="1"/>
           <p:nvPr/>
         </p:nvSpPr>
         <p:spPr>
           <a:xfrm>
             <a:off x="457200" y="274320"/>
-            <a:ext cx="8229600" cy="548640"/>
+            <a:ext cx="7680960" cy="548640"/>
           </a:xfrm>
           <a:prstGeom prst="rect">
             <a:avLst/>
@@ -9613,7 +9757,7 @@
       </p:sp>
       <p:sp>
         <p:nvSpPr>
-          <p:cNvPr id="3" name="Text 1"/>
+          <p:cNvPr id="4" name="Text 1"/>
           <p:cNvSpPr txBox="1"/>
           <p:nvPr/>
         </p:nvSpPr>
@@ -9654,7 +9798,7 @@
       </p:sp>
       <p:sp>
         <p:nvSpPr>
-          <p:cNvPr id="4" name="Shape 2"/>
+          <p:cNvPr id="5" name="Shape 2"/>
           <p:cNvSpPr/>
           <p:nvPr/>
         </p:nvSpPr>
@@ -9681,7 +9825,7 @@
       </p:sp>
       <p:sp>
         <p:nvSpPr>
-          <p:cNvPr id="5" name="Shape 3"/>
+          <p:cNvPr id="6" name="Shape 3"/>
           <p:cNvSpPr/>
           <p:nvPr/>
         </p:nvSpPr>
@@ -9708,7 +9852,7 @@
       </p:sp>
       <p:sp>
         <p:nvSpPr>
-          <p:cNvPr id="6" name="Text 4"/>
+          <p:cNvPr id="7" name="Text 4"/>
           <p:cNvSpPr txBox="1"/>
           <p:nvPr/>
         </p:nvSpPr>
@@ -9749,7 +9893,7 @@
       </p:sp>
       <p:sp>
         <p:nvSpPr>
-          <p:cNvPr id="7" name="Shape 5"/>
+          <p:cNvPr id="8" name="Shape 5"/>
           <p:cNvSpPr/>
           <p:nvPr/>
         </p:nvSpPr>
@@ -9776,7 +9920,7 @@
       </p:sp>
       <p:sp>
         <p:nvSpPr>
-          <p:cNvPr id="8" name="Shape 6"/>
+          <p:cNvPr id="9" name="Shape 6"/>
           <p:cNvSpPr/>
           <p:nvPr/>
         </p:nvSpPr>
@@ -9803,7 +9947,7 @@
       </p:sp>
       <p:sp>
         <p:nvSpPr>
-          <p:cNvPr id="9" name="Text 7"/>
+          <p:cNvPr id="10" name="Text 7"/>
           <p:cNvSpPr txBox="1"/>
           <p:nvPr/>
         </p:nvSpPr>
@@ -9844,7 +9988,7 @@
       </p:sp>
       <p:sp>
         <p:nvSpPr>
-          <p:cNvPr id="10" name="Shape 8"/>
+          <p:cNvPr id="11" name="Shape 8"/>
           <p:cNvSpPr/>
           <p:nvPr/>
         </p:nvSpPr>
@@ -9871,7 +10015,7 @@
       </p:sp>
       <p:sp>
         <p:nvSpPr>
-          <p:cNvPr id="11" name="Shape 9"/>
+          <p:cNvPr id="12" name="Shape 9"/>
           <p:cNvSpPr/>
           <p:nvPr/>
         </p:nvSpPr>
@@ -9898,7 +10042,7 @@
       </p:sp>
       <p:sp>
         <p:nvSpPr>
-          <p:cNvPr id="12" name="Text 10"/>
+          <p:cNvPr id="13" name="Text 10"/>
           <p:cNvSpPr txBox="1"/>
           <p:nvPr/>
         </p:nvSpPr>
@@ -9939,7 +10083,7 @@
       </p:sp>
       <p:sp>
         <p:nvSpPr>
-          <p:cNvPr id="13" name="Shape 11"/>
+          <p:cNvPr id="14" name="Shape 11"/>
           <p:cNvSpPr/>
           <p:nvPr/>
         </p:nvSpPr>
@@ -9966,7 +10110,7 @@
       </p:sp>
       <p:sp>
         <p:nvSpPr>
-          <p:cNvPr id="14" name="Shape 12"/>
+          <p:cNvPr id="15" name="Shape 12"/>
           <p:cNvSpPr/>
           <p:nvPr/>
         </p:nvSpPr>
@@ -9993,7 +10137,7 @@
       </p:sp>
       <p:sp>
         <p:nvSpPr>
-          <p:cNvPr id="15" name="Text 13"/>
+          <p:cNvPr id="16" name="Text 13"/>
           <p:cNvSpPr txBox="1"/>
           <p:nvPr/>
         </p:nvSpPr>
@@ -10034,7 +10178,7 @@
       </p:sp>
       <p:sp>
         <p:nvSpPr>
-          <p:cNvPr id="16" name="Shape 14"/>
+          <p:cNvPr id="17" name="Shape 14"/>
           <p:cNvSpPr/>
           <p:nvPr/>
         </p:nvSpPr>
@@ -10061,7 +10205,7 @@
       </p:sp>
       <p:sp>
         <p:nvSpPr>
-          <p:cNvPr id="17" name="Shape 15"/>
+          <p:cNvPr id="18" name="Shape 15"/>
           <p:cNvSpPr/>
           <p:nvPr/>
         </p:nvSpPr>
@@ -10088,7 +10232,7 @@
       </p:sp>
       <p:sp>
         <p:nvSpPr>
-          <p:cNvPr id="18" name="Text 16"/>
+          <p:cNvPr id="19" name="Text 16"/>
           <p:cNvSpPr txBox="1"/>
           <p:nvPr/>
         </p:nvSpPr>
@@ -10129,7 +10273,7 @@
       </p:sp>
       <p:sp>
         <p:nvSpPr>
-          <p:cNvPr id="19" name="Shape 17"/>
+          <p:cNvPr id="20" name="Shape 17"/>
           <p:cNvSpPr/>
           <p:nvPr/>
         </p:nvSpPr>
@@ -10156,7 +10300,7 @@
       </p:sp>
       <p:sp>
         <p:nvSpPr>
-          <p:cNvPr id="20" name="Shape 18"/>
+          <p:cNvPr id="21" name="Shape 18"/>
           <p:cNvSpPr/>
           <p:nvPr/>
         </p:nvSpPr>
@@ -10183,7 +10327,7 @@
       </p:sp>
       <p:sp>
         <p:nvSpPr>
-          <p:cNvPr id="21" name="Text 19"/>
+          <p:cNvPr id="22" name="Text 19"/>
           <p:cNvSpPr txBox="1"/>
           <p:nvPr/>
         </p:nvSpPr>
@@ -10224,7 +10368,7 @@
       </p:sp>
       <p:sp>
         <p:nvSpPr>
-          <p:cNvPr id="22" name="Shape 20"/>
+          <p:cNvPr id="23" name="Shape 20"/>
           <p:cNvSpPr/>
           <p:nvPr/>
         </p:nvSpPr>
@@ -10251,7 +10395,7 @@
       </p:sp>
       <p:sp>
         <p:nvSpPr>
-          <p:cNvPr id="23" name="Shape 21"/>
+          <p:cNvPr id="24" name="Shape 21"/>
           <p:cNvSpPr/>
           <p:nvPr/>
         </p:nvSpPr>
@@ -10278,7 +10422,7 @@
       </p:sp>
       <p:sp>
         <p:nvSpPr>
-          <p:cNvPr id="24" name="Text 22"/>
+          <p:cNvPr id="25" name="Text 22"/>
           <p:cNvSpPr txBox="1"/>
           <p:nvPr/>
         </p:nvSpPr>
@@ -10319,7 +10463,7 @@
       </p:sp>
       <p:sp>
         <p:nvSpPr>
-          <p:cNvPr id="25" name="Text 23"/>
+          <p:cNvPr id="26" name="Text 23"/>
           <p:cNvSpPr txBox="1"/>
           <p:nvPr/>
         </p:nvSpPr>
@@ -10390,16 +10534,40 @@
           <a:chExt cx="0" cy="0"/>
         </a:xfrm>
       </p:grpSpPr>
-      <p:sp>
-        <p:nvSpPr>
-          <p:cNvPr id="2" name="Text 0"/>
+      <p:pic>
+        <p:nvPicPr>
+          <p:cNvPr id="2" name="Image 0" descr="preencoded.png">    </p:cNvPr>
+          <p:cNvPicPr>
+            <a:picLocks noChangeAspect="1"/>
+          </p:cNvPicPr>
+          <p:nvPr/>
+        </p:nvPicPr>
+        <p:blipFill>
+          <a:blip r:embed="rId1"/>
+          <a:stretch>
+            <a:fillRect/>
+          </a:stretch>
+        </p:blipFill>
+        <p:spPr>
+          <a:xfrm>
+            <a:off x="8211312" y="201168"/>
+            <a:ext cx="457200" cy="539496"/>
+          </a:xfrm>
+          <a:prstGeom prst="rect">
+            <a:avLst/>
+          </a:prstGeom>
+        </p:spPr>
+      </p:pic>
+      <p:sp>
+        <p:nvSpPr>
+          <p:cNvPr id="3" name="Text 0"/>
           <p:cNvSpPr txBox="1"/>
           <p:nvPr/>
         </p:nvSpPr>
         <p:spPr>
           <a:xfrm>
             <a:off x="457200" y="274320"/>
-            <a:ext cx="8229600" cy="548640"/>
+            <a:ext cx="7680960" cy="548640"/>
           </a:xfrm>
           <a:prstGeom prst="rect">
             <a:avLst/>
@@ -10433,7 +10601,7 @@
       </p:sp>
       <p:sp>
         <p:nvSpPr>
-          <p:cNvPr id="3" name="Text 1"/>
+          <p:cNvPr id="4" name="Text 1"/>
           <p:cNvSpPr txBox="1"/>
           <p:nvPr/>
         </p:nvSpPr>
@@ -10474,7 +10642,7 @@
       </p:sp>
       <p:sp>
         <p:nvSpPr>
-          <p:cNvPr id="4" name="Shape 2"/>
+          <p:cNvPr id="5" name="Shape 2"/>
           <p:cNvSpPr/>
           <p:nvPr/>
         </p:nvSpPr>
@@ -10501,7 +10669,7 @@
       </p:sp>
       <p:sp>
         <p:nvSpPr>
-          <p:cNvPr id="5" name="Shape 3"/>
+          <p:cNvPr id="6" name="Shape 3"/>
           <p:cNvSpPr/>
           <p:nvPr/>
         </p:nvSpPr>
@@ -10526,7 +10694,7 @@
       </p:sp>
       <p:sp>
         <p:nvSpPr>
-          <p:cNvPr id="6" name="Text 4"/>
+          <p:cNvPr id="7" name="Text 4"/>
           <p:cNvSpPr txBox="1"/>
           <p:nvPr/>
         </p:nvSpPr>
@@ -10567,7 +10735,7 @@
       </p:sp>
       <p:sp>
         <p:nvSpPr>
-          <p:cNvPr id="7" name="Text 5"/>
+          <p:cNvPr id="8" name="Text 5"/>
           <p:cNvSpPr txBox="1"/>
           <p:nvPr/>
         </p:nvSpPr>
@@ -10608,7 +10776,7 @@
       </p:sp>
       <p:sp>
         <p:nvSpPr>
-          <p:cNvPr id="8" name="Text 6"/>
+          <p:cNvPr id="9" name="Text 6"/>
           <p:cNvSpPr txBox="1"/>
           <p:nvPr/>
         </p:nvSpPr>
@@ -10649,7 +10817,7 @@
       </p:sp>
       <p:sp>
         <p:nvSpPr>
-          <p:cNvPr id="9" name="Shape 7"/>
+          <p:cNvPr id="10" name="Shape 7"/>
           <p:cNvSpPr/>
           <p:nvPr/>
         </p:nvSpPr>
@@ -10676,7 +10844,7 @@
       </p:sp>
       <p:sp>
         <p:nvSpPr>
-          <p:cNvPr id="10" name="Shape 8"/>
+          <p:cNvPr id="11" name="Shape 8"/>
           <p:cNvSpPr/>
           <p:nvPr/>
         </p:nvSpPr>
@@ -10701,7 +10869,7 @@
       </p:sp>
       <p:sp>
         <p:nvSpPr>
-          <p:cNvPr id="11" name="Text 9"/>
+          <p:cNvPr id="12" name="Text 9"/>
           <p:cNvSpPr txBox="1"/>
           <p:nvPr/>
         </p:nvSpPr>
@@ -10742,7 +10910,7 @@
       </p:sp>
       <p:sp>
         <p:nvSpPr>
-          <p:cNvPr id="12" name="Text 10"/>
+          <p:cNvPr id="13" name="Text 10"/>
           <p:cNvSpPr txBox="1"/>
           <p:nvPr/>
         </p:nvSpPr>
@@ -10783,7 +10951,7 @@
       </p:sp>
       <p:sp>
         <p:nvSpPr>
-          <p:cNvPr id="13" name="Text 11"/>
+          <p:cNvPr id="14" name="Text 11"/>
           <p:cNvSpPr txBox="1"/>
           <p:nvPr/>
         </p:nvSpPr>
@@ -10824,7 +10992,7 @@
       </p:sp>
       <p:sp>
         <p:nvSpPr>
-          <p:cNvPr id="14" name="Shape 12"/>
+          <p:cNvPr id="15" name="Shape 12"/>
           <p:cNvSpPr/>
           <p:nvPr/>
         </p:nvSpPr>
@@ -10851,7 +11019,7 @@
       </p:sp>
       <p:sp>
         <p:nvSpPr>
-          <p:cNvPr id="15" name="Shape 13"/>
+          <p:cNvPr id="16" name="Shape 13"/>
           <p:cNvSpPr/>
           <p:nvPr/>
         </p:nvSpPr>
@@ -10876,7 +11044,7 @@
       </p:sp>
       <p:sp>
         <p:nvSpPr>
-          <p:cNvPr id="16" name="Text 14"/>
+          <p:cNvPr id="17" name="Text 14"/>
           <p:cNvSpPr txBox="1"/>
           <p:nvPr/>
         </p:nvSpPr>
@@ -10917,7 +11085,7 @@
       </p:sp>
       <p:sp>
         <p:nvSpPr>
-          <p:cNvPr id="17" name="Text 15"/>
+          <p:cNvPr id="18" name="Text 15"/>
           <p:cNvSpPr txBox="1"/>
           <p:nvPr/>
         </p:nvSpPr>
@@ -10958,7 +11126,7 @@
       </p:sp>
       <p:sp>
         <p:nvSpPr>
-          <p:cNvPr id="18" name="Text 16"/>
+          <p:cNvPr id="19" name="Text 16"/>
           <p:cNvSpPr txBox="1"/>
           <p:nvPr/>
         </p:nvSpPr>
@@ -10999,7 +11167,7 @@
       </p:sp>
       <p:sp>
         <p:nvSpPr>
-          <p:cNvPr id="19" name="Shape 17"/>
+          <p:cNvPr id="20" name="Shape 17"/>
           <p:cNvSpPr/>
           <p:nvPr/>
         </p:nvSpPr>
@@ -11026,7 +11194,7 @@
       </p:sp>
       <p:sp>
         <p:nvSpPr>
-          <p:cNvPr id="20" name="Shape 18"/>
+          <p:cNvPr id="21" name="Shape 18"/>
           <p:cNvSpPr/>
           <p:nvPr/>
         </p:nvSpPr>
@@ -11051,7 +11219,7 @@
       </p:sp>
       <p:sp>
         <p:nvSpPr>
-          <p:cNvPr id="21" name="Text 19"/>
+          <p:cNvPr id="22" name="Text 19"/>
           <p:cNvSpPr txBox="1"/>
           <p:nvPr/>
         </p:nvSpPr>
@@ -11092,7 +11260,7 @@
       </p:sp>
       <p:sp>
         <p:nvSpPr>
-          <p:cNvPr id="22" name="Text 20"/>
+          <p:cNvPr id="23" name="Text 20"/>
           <p:cNvSpPr txBox="1"/>
           <p:nvPr/>
         </p:nvSpPr>
@@ -11133,7 +11301,7 @@
       </p:sp>
       <p:sp>
         <p:nvSpPr>
-          <p:cNvPr id="23" name="Text 21"/>
+          <p:cNvPr id="24" name="Text 21"/>
           <p:cNvSpPr txBox="1"/>
           <p:nvPr/>
         </p:nvSpPr>
@@ -11174,7 +11342,7 @@
       </p:sp>
       <p:sp>
         <p:nvSpPr>
-          <p:cNvPr id="24" name="Shape 22"/>
+          <p:cNvPr id="25" name="Shape 22"/>
           <p:cNvSpPr/>
           <p:nvPr/>
         </p:nvSpPr>
@@ -11201,7 +11369,7 @@
       </p:sp>
       <p:sp>
         <p:nvSpPr>
-          <p:cNvPr id="25" name="Shape 23"/>
+          <p:cNvPr id="26" name="Shape 23"/>
           <p:cNvSpPr/>
           <p:nvPr/>
         </p:nvSpPr>
@@ -11226,7 +11394,7 @@
       </p:sp>
       <p:sp>
         <p:nvSpPr>
-          <p:cNvPr id="26" name="Text 24"/>
+          <p:cNvPr id="27" name="Text 24"/>
           <p:cNvSpPr txBox="1"/>
           <p:nvPr/>
         </p:nvSpPr>
@@ -11267,7 +11435,7 @@
       </p:sp>
       <p:sp>
         <p:nvSpPr>
-          <p:cNvPr id="27" name="Text 25"/>
+          <p:cNvPr id="28" name="Text 25"/>
           <p:cNvSpPr txBox="1"/>
           <p:nvPr/>
         </p:nvSpPr>
@@ -11308,7 +11476,7 @@
       </p:sp>
       <p:sp>
         <p:nvSpPr>
-          <p:cNvPr id="28" name="Text 26"/>
+          <p:cNvPr id="29" name="Text 26"/>
           <p:cNvSpPr txBox="1"/>
           <p:nvPr/>
         </p:nvSpPr>
@@ -11349,7 +11517,7 @@
       </p:sp>
       <p:sp>
         <p:nvSpPr>
-          <p:cNvPr id="29" name="Shape 27"/>
+          <p:cNvPr id="30" name="Shape 27"/>
           <p:cNvSpPr/>
           <p:nvPr/>
         </p:nvSpPr>
@@ -11376,7 +11544,7 @@
       </p:sp>
       <p:sp>
         <p:nvSpPr>
-          <p:cNvPr id="30" name="Shape 28"/>
+          <p:cNvPr id="31" name="Shape 28"/>
           <p:cNvSpPr/>
           <p:nvPr/>
         </p:nvSpPr>
@@ -11401,7 +11569,7 @@
       </p:sp>
       <p:sp>
         <p:nvSpPr>
-          <p:cNvPr id="31" name="Text 29"/>
+          <p:cNvPr id="32" name="Text 29"/>
           <p:cNvSpPr txBox="1"/>
           <p:nvPr/>
         </p:nvSpPr>
@@ -11442,7 +11610,7 @@
       </p:sp>
       <p:sp>
         <p:nvSpPr>
-          <p:cNvPr id="32" name="Text 30"/>
+          <p:cNvPr id="33" name="Text 30"/>
           <p:cNvSpPr txBox="1"/>
           <p:nvPr/>
         </p:nvSpPr>
@@ -11483,7 +11651,7 @@
       </p:sp>
       <p:sp>
         <p:nvSpPr>
-          <p:cNvPr id="33" name="Text 31"/>
+          <p:cNvPr id="34" name="Text 31"/>
           <p:cNvSpPr txBox="1"/>
           <p:nvPr/>
         </p:nvSpPr>
@@ -11524,7 +11692,7 @@
       </p:sp>
       <p:sp>
         <p:nvSpPr>
-          <p:cNvPr id="34" name="Text 32"/>
+          <p:cNvPr id="35" name="Text 32"/>
           <p:cNvSpPr txBox="1"/>
           <p:nvPr/>
         </p:nvSpPr>
@@ -11595,16 +11763,40 @@
           <a:chExt cx="0" cy="0"/>
         </a:xfrm>
       </p:grpSpPr>
-      <p:sp>
-        <p:nvSpPr>
-          <p:cNvPr id="2" name="Text 0"/>
+      <p:pic>
+        <p:nvPicPr>
+          <p:cNvPr id="2" name="Image 0" descr="preencoded.png">    </p:cNvPr>
+          <p:cNvPicPr>
+            <a:picLocks noChangeAspect="1"/>
+          </p:cNvPicPr>
+          <p:nvPr/>
+        </p:nvPicPr>
+        <p:blipFill>
+          <a:blip r:embed="rId1"/>
+          <a:stretch>
+            <a:fillRect/>
+          </a:stretch>
+        </p:blipFill>
+        <p:spPr>
+          <a:xfrm>
+            <a:off x="8211312" y="201168"/>
+            <a:ext cx="457200" cy="539496"/>
+          </a:xfrm>
+          <a:prstGeom prst="rect">
+            <a:avLst/>
+          </a:prstGeom>
+        </p:spPr>
+      </p:pic>
+      <p:sp>
+        <p:nvSpPr>
+          <p:cNvPr id="3" name="Text 0"/>
           <p:cNvSpPr txBox="1"/>
           <p:nvPr/>
         </p:nvSpPr>
         <p:spPr>
           <a:xfrm>
             <a:off x="457200" y="274320"/>
-            <a:ext cx="8229600" cy="548640"/>
+            <a:ext cx="7680960" cy="548640"/>
           </a:xfrm>
           <a:prstGeom prst="rect">
             <a:avLst/>
@@ -11638,7 +11830,7 @@
       </p:sp>
       <p:sp>
         <p:nvSpPr>
-          <p:cNvPr id="3" name="Text 1"/>
+          <p:cNvPr id="4" name="Text 1"/>
           <p:cNvSpPr txBox="1"/>
           <p:nvPr/>
         </p:nvSpPr>
@@ -17173,7 +17365,7 @@
       </p:graphicFrame>
       <p:sp>
         <p:nvSpPr>
-          <p:cNvPr id="6" name="Text 2"/>
+          <p:cNvPr id="7" name="Text 2"/>
           <p:cNvSpPr txBox="1"/>
           <p:nvPr/>
         </p:nvSpPr>
@@ -17214,7 +17406,7 @@
       </p:sp>
       <p:sp>
         <p:nvSpPr>
-          <p:cNvPr id="7" name="Text 3"/>
+          <p:cNvPr id="8" name="Text 3"/>
           <p:cNvSpPr txBox="1"/>
           <p:nvPr/>
         </p:nvSpPr>
@@ -17255,7 +17447,7 @@
       </p:sp>
       <p:sp>
         <p:nvSpPr>
-          <p:cNvPr id="8" name="Text 4"/>
+          <p:cNvPr id="9" name="Text 4"/>
           <p:cNvSpPr txBox="1"/>
           <p:nvPr/>
         </p:nvSpPr>
@@ -17326,16 +17518,40 @@
           <a:chExt cx="0" cy="0"/>
         </a:xfrm>
       </p:grpSpPr>
-      <p:sp>
-        <p:nvSpPr>
-          <p:cNvPr id="2" name="Text 0"/>
+      <p:pic>
+        <p:nvPicPr>
+          <p:cNvPr id="2" name="Image 0" descr="preencoded.png">    </p:cNvPr>
+          <p:cNvPicPr>
+            <a:picLocks noChangeAspect="1"/>
+          </p:cNvPicPr>
+          <p:nvPr/>
+        </p:nvPicPr>
+        <p:blipFill>
+          <a:blip r:embed="rId1"/>
+          <a:stretch>
+            <a:fillRect/>
+          </a:stretch>
+        </p:blipFill>
+        <p:spPr>
+          <a:xfrm>
+            <a:off x="8211312" y="201168"/>
+            <a:ext cx="457200" cy="539496"/>
+          </a:xfrm>
+          <a:prstGeom prst="rect">
+            <a:avLst/>
+          </a:prstGeom>
+        </p:spPr>
+      </p:pic>
+      <p:sp>
+        <p:nvSpPr>
+          <p:cNvPr id="3" name="Text 0"/>
           <p:cNvSpPr txBox="1"/>
           <p:nvPr/>
         </p:nvSpPr>
         <p:spPr>
           <a:xfrm>
             <a:off x="457200" y="274320"/>
-            <a:ext cx="8229600" cy="548640"/>
+            <a:ext cx="7680960" cy="548640"/>
           </a:xfrm>
           <a:prstGeom prst="rect">
             <a:avLst/>
@@ -17369,7 +17585,7 @@
       </p:sp>
       <p:sp>
         <p:nvSpPr>
-          <p:cNvPr id="3" name="Text 1"/>
+          <p:cNvPr id="4" name="Text 1"/>
           <p:cNvSpPr txBox="1"/>
           <p:nvPr/>
         </p:nvSpPr>
@@ -20119,7 +20335,7 @@
       </p:graphicFrame>
       <p:sp>
         <p:nvSpPr>
-          <p:cNvPr id="5" name="Text 2"/>
+          <p:cNvPr id="6" name="Text 2"/>
           <p:cNvSpPr txBox="1"/>
           <p:nvPr/>
         </p:nvSpPr>
@@ -20160,7 +20376,7 @@
       </p:sp>
       <p:sp>
         <p:nvSpPr>
-          <p:cNvPr id="6" name="Text 3"/>
+          <p:cNvPr id="7" name="Text 3"/>
           <p:cNvSpPr txBox="1"/>
           <p:nvPr/>
         </p:nvSpPr>
@@ -20231,16 +20447,40 @@
           <a:chExt cx="0" cy="0"/>
         </a:xfrm>
       </p:grpSpPr>
-      <p:sp>
-        <p:nvSpPr>
-          <p:cNvPr id="2" name="Text 0"/>
+      <p:pic>
+        <p:nvPicPr>
+          <p:cNvPr id="2" name="Image 0" descr="preencoded.png">    </p:cNvPr>
+          <p:cNvPicPr>
+            <a:picLocks noChangeAspect="1"/>
+          </p:cNvPicPr>
+          <p:nvPr/>
+        </p:nvPicPr>
+        <p:blipFill>
+          <a:blip r:embed="rId1"/>
+          <a:stretch>
+            <a:fillRect/>
+          </a:stretch>
+        </p:blipFill>
+        <p:spPr>
+          <a:xfrm>
+            <a:off x="8211312" y="201168"/>
+            <a:ext cx="457200" cy="539496"/>
+          </a:xfrm>
+          <a:prstGeom prst="rect">
+            <a:avLst/>
+          </a:prstGeom>
+        </p:spPr>
+      </p:pic>
+      <p:sp>
+        <p:nvSpPr>
+          <p:cNvPr id="3" name="Text 0"/>
           <p:cNvSpPr txBox="1"/>
           <p:nvPr/>
         </p:nvSpPr>
         <p:spPr>
           <a:xfrm>
             <a:off x="457200" y="274320"/>
-            <a:ext cx="8229600" cy="548640"/>
+            <a:ext cx="7680960" cy="548640"/>
           </a:xfrm>
           <a:prstGeom prst="rect">
             <a:avLst/>
@@ -20274,7 +20514,7 @@
       </p:sp>
       <p:sp>
         <p:nvSpPr>
-          <p:cNvPr id="3" name="Text 1"/>
+          <p:cNvPr id="4" name="Text 1"/>
           <p:cNvSpPr txBox="1"/>
           <p:nvPr/>
         </p:nvSpPr>
@@ -20315,7 +20555,7 @@
       </p:sp>
       <p:sp>
         <p:nvSpPr>
-          <p:cNvPr id="4" name="Shape 2"/>
+          <p:cNvPr id="5" name="Shape 2"/>
           <p:cNvSpPr/>
           <p:nvPr/>
         </p:nvSpPr>
@@ -20342,7 +20582,7 @@
       </p:sp>
       <p:sp>
         <p:nvSpPr>
-          <p:cNvPr id="5" name="Shape 3"/>
+          <p:cNvPr id="6" name="Shape 3"/>
           <p:cNvSpPr/>
           <p:nvPr/>
         </p:nvSpPr>
@@ -20367,7 +20607,7 @@
       </p:sp>
       <p:sp>
         <p:nvSpPr>
-          <p:cNvPr id="6" name="Text 4"/>
+          <p:cNvPr id="7" name="Text 4"/>
           <p:cNvSpPr txBox="1"/>
           <p:nvPr/>
         </p:nvSpPr>
@@ -20408,7 +20648,7 @@
       </p:sp>
       <p:sp>
         <p:nvSpPr>
-          <p:cNvPr id="7" name="Text 5"/>
+          <p:cNvPr id="8" name="Text 5"/>
           <p:cNvSpPr txBox="1"/>
           <p:nvPr/>
         </p:nvSpPr>
@@ -20449,7 +20689,7 @@
       </p:sp>
       <p:sp>
         <p:nvSpPr>
-          <p:cNvPr id="8" name="Text 6"/>
+          <p:cNvPr id="9" name="Text 6"/>
           <p:cNvSpPr txBox="1"/>
           <p:nvPr/>
         </p:nvSpPr>
@@ -20490,7 +20730,7 @@
       </p:sp>
       <p:sp>
         <p:nvSpPr>
-          <p:cNvPr id="9" name="Shape 7"/>
+          <p:cNvPr id="10" name="Shape 7"/>
           <p:cNvSpPr/>
           <p:nvPr/>
         </p:nvSpPr>
@@ -20517,7 +20757,7 @@
       </p:sp>
       <p:sp>
         <p:nvSpPr>
-          <p:cNvPr id="10" name="Shape 8"/>
+          <p:cNvPr id="11" name="Shape 8"/>
           <p:cNvSpPr/>
           <p:nvPr/>
         </p:nvSpPr>
@@ -20542,7 +20782,7 @@
       </p:sp>
       <p:sp>
         <p:nvSpPr>
-          <p:cNvPr id="11" name="Text 9"/>
+          <p:cNvPr id="12" name="Text 9"/>
           <p:cNvSpPr txBox="1"/>
           <p:nvPr/>
         </p:nvSpPr>
@@ -20583,7 +20823,7 @@
       </p:sp>
       <p:sp>
         <p:nvSpPr>
-          <p:cNvPr id="12" name="Text 10"/>
+          <p:cNvPr id="13" name="Text 10"/>
           <p:cNvSpPr txBox="1"/>
           <p:nvPr/>
         </p:nvSpPr>
@@ -20624,7 +20864,7 @@
       </p:sp>
       <p:sp>
         <p:nvSpPr>
-          <p:cNvPr id="13" name="Text 11"/>
+          <p:cNvPr id="14" name="Text 11"/>
           <p:cNvSpPr txBox="1"/>
           <p:nvPr/>
         </p:nvSpPr>
@@ -20665,7 +20905,7 @@
       </p:sp>
       <p:sp>
         <p:nvSpPr>
-          <p:cNvPr id="14" name="Shape 12"/>
+          <p:cNvPr id="15" name="Shape 12"/>
           <p:cNvSpPr/>
           <p:nvPr/>
         </p:nvSpPr>
@@ -20692,7 +20932,7 @@
       </p:sp>
       <p:sp>
         <p:nvSpPr>
-          <p:cNvPr id="15" name="Shape 13"/>
+          <p:cNvPr id="16" name="Shape 13"/>
           <p:cNvSpPr/>
           <p:nvPr/>
         </p:nvSpPr>
@@ -20717,7 +20957,7 @@
       </p:sp>
       <p:sp>
         <p:nvSpPr>
-          <p:cNvPr id="16" name="Text 14"/>
+          <p:cNvPr id="17" name="Text 14"/>
           <p:cNvSpPr txBox="1"/>
           <p:nvPr/>
         </p:nvSpPr>
@@ -20758,7 +20998,7 @@
       </p:sp>
       <p:sp>
         <p:nvSpPr>
-          <p:cNvPr id="17" name="Text 15"/>
+          <p:cNvPr id="18" name="Text 15"/>
           <p:cNvSpPr txBox="1"/>
           <p:nvPr/>
         </p:nvSpPr>
@@ -20799,7 +21039,7 @@
       </p:sp>
       <p:sp>
         <p:nvSpPr>
-          <p:cNvPr id="18" name="Text 16"/>
+          <p:cNvPr id="19" name="Text 16"/>
           <p:cNvSpPr txBox="1"/>
           <p:nvPr/>
         </p:nvSpPr>
@@ -20840,7 +21080,7 @@
       </p:sp>
       <p:sp>
         <p:nvSpPr>
-          <p:cNvPr id="19" name="Text 17"/>
+          <p:cNvPr id="20" name="Text 17"/>
           <p:cNvSpPr txBox="1"/>
           <p:nvPr/>
         </p:nvSpPr>
@@ -20911,16 +21151,40 @@
           <a:chExt cx="0" cy="0"/>
         </a:xfrm>
       </p:grpSpPr>
-      <p:sp>
-        <p:nvSpPr>
-          <p:cNvPr id="2" name="Text 0"/>
+      <p:pic>
+        <p:nvPicPr>
+          <p:cNvPr id="2" name="Image 0" descr="preencoded.png">    </p:cNvPr>
+          <p:cNvPicPr>
+            <a:picLocks noChangeAspect="1"/>
+          </p:cNvPicPr>
+          <p:nvPr/>
+        </p:nvPicPr>
+        <p:blipFill>
+          <a:blip r:embed="rId1"/>
+          <a:stretch>
+            <a:fillRect/>
+          </a:stretch>
+        </p:blipFill>
+        <p:spPr>
+          <a:xfrm>
+            <a:off x="8211312" y="201168"/>
+            <a:ext cx="457200" cy="539496"/>
+          </a:xfrm>
+          <a:prstGeom prst="rect">
+            <a:avLst/>
+          </a:prstGeom>
+        </p:spPr>
+      </p:pic>
+      <p:sp>
+        <p:nvSpPr>
+          <p:cNvPr id="3" name="Text 0"/>
           <p:cNvSpPr txBox="1"/>
           <p:nvPr/>
         </p:nvSpPr>
         <p:spPr>
           <a:xfrm>
             <a:off x="457200" y="274320"/>
-            <a:ext cx="8229600" cy="548640"/>
+            <a:ext cx="7680960" cy="548640"/>
           </a:xfrm>
           <a:prstGeom prst="rect">
             <a:avLst/>
@@ -20954,7 +21218,7 @@
       </p:sp>
       <p:sp>
         <p:nvSpPr>
-          <p:cNvPr id="3" name="Text 1"/>
+          <p:cNvPr id="4" name="Text 1"/>
           <p:cNvSpPr txBox="1"/>
           <p:nvPr/>
         </p:nvSpPr>
@@ -20995,7 +21259,7 @@
       </p:sp>
       <p:sp>
         <p:nvSpPr>
-          <p:cNvPr id="4" name="Shape 2"/>
+          <p:cNvPr id="5" name="Shape 2"/>
           <p:cNvSpPr/>
           <p:nvPr/>
         </p:nvSpPr>
@@ -21022,7 +21286,7 @@
       </p:sp>
       <p:sp>
         <p:nvSpPr>
-          <p:cNvPr id="5" name="Shape 3"/>
+          <p:cNvPr id="6" name="Shape 3"/>
           <p:cNvSpPr/>
           <p:nvPr/>
         </p:nvSpPr>
@@ -21047,7 +21311,7 @@
       </p:sp>
       <p:sp>
         <p:nvSpPr>
-          <p:cNvPr id="6" name="Text 4"/>
+          <p:cNvPr id="7" name="Text 4"/>
           <p:cNvSpPr txBox="1"/>
           <p:nvPr/>
         </p:nvSpPr>
@@ -21088,7 +21352,7 @@
       </p:sp>
       <p:sp>
         <p:nvSpPr>
-          <p:cNvPr id="7" name="Text 5"/>
+          <p:cNvPr id="8" name="Text 5"/>
           <p:cNvSpPr txBox="1"/>
           <p:nvPr/>
         </p:nvSpPr>
@@ -21129,7 +21393,7 @@
       </p:sp>
       <p:sp>
         <p:nvSpPr>
-          <p:cNvPr id="8" name="Text 6"/>
+          <p:cNvPr id="9" name="Text 6"/>
           <p:cNvSpPr txBox="1"/>
           <p:nvPr/>
         </p:nvSpPr>
@@ -21170,7 +21434,7 @@
       </p:sp>
       <p:sp>
         <p:nvSpPr>
-          <p:cNvPr id="9" name="Shape 7"/>
+          <p:cNvPr id="10" name="Shape 7"/>
           <p:cNvSpPr/>
           <p:nvPr/>
         </p:nvSpPr>
@@ -21197,7 +21461,7 @@
       </p:sp>
       <p:sp>
         <p:nvSpPr>
-          <p:cNvPr id="10" name="Shape 8"/>
+          <p:cNvPr id="11" name="Shape 8"/>
           <p:cNvSpPr/>
           <p:nvPr/>
         </p:nvSpPr>
@@ -21222,7 +21486,7 @@
       </p:sp>
       <p:sp>
         <p:nvSpPr>
-          <p:cNvPr id="11" name="Text 9"/>
+          <p:cNvPr id="12" name="Text 9"/>
           <p:cNvSpPr txBox="1"/>
           <p:nvPr/>
         </p:nvSpPr>
@@ -21263,7 +21527,7 @@
       </p:sp>
       <p:sp>
         <p:nvSpPr>
-          <p:cNvPr id="12" name="Text 10"/>
+          <p:cNvPr id="13" name="Text 10"/>
           <p:cNvSpPr txBox="1"/>
           <p:nvPr/>
         </p:nvSpPr>
@@ -21304,7 +21568,7 @@
       </p:sp>
       <p:sp>
         <p:nvSpPr>
-          <p:cNvPr id="13" name="Text 11"/>
+          <p:cNvPr id="14" name="Text 11"/>
           <p:cNvSpPr txBox="1"/>
           <p:nvPr/>
         </p:nvSpPr>
@@ -21345,7 +21609,7 @@
       </p:sp>
       <p:sp>
         <p:nvSpPr>
-          <p:cNvPr id="14" name="Shape 12"/>
+          <p:cNvPr id="15" name="Shape 12"/>
           <p:cNvSpPr/>
           <p:nvPr/>
         </p:nvSpPr>
@@ -21372,7 +21636,7 @@
       </p:sp>
       <p:sp>
         <p:nvSpPr>
-          <p:cNvPr id="15" name="Shape 13"/>
+          <p:cNvPr id="16" name="Shape 13"/>
           <p:cNvSpPr/>
           <p:nvPr/>
         </p:nvSpPr>
@@ -21397,7 +21661,7 @@
       </p:sp>
       <p:sp>
         <p:nvSpPr>
-          <p:cNvPr id="16" name="Text 14"/>
+          <p:cNvPr id="17" name="Text 14"/>
           <p:cNvSpPr txBox="1"/>
           <p:nvPr/>
         </p:nvSpPr>
@@ -21438,7 +21702,7 @@
       </p:sp>
       <p:sp>
         <p:nvSpPr>
-          <p:cNvPr id="17" name="Text 15"/>
+          <p:cNvPr id="18" name="Text 15"/>
           <p:cNvSpPr txBox="1"/>
           <p:nvPr/>
         </p:nvSpPr>
@@ -21479,7 +21743,7 @@
       </p:sp>
       <p:sp>
         <p:nvSpPr>
-          <p:cNvPr id="18" name="Text 16"/>
+          <p:cNvPr id="19" name="Text 16"/>
           <p:cNvSpPr txBox="1"/>
           <p:nvPr/>
         </p:nvSpPr>
@@ -21520,7 +21784,7 @@
       </p:sp>
       <p:sp>
         <p:nvSpPr>
-          <p:cNvPr id="19" name="Shape 17"/>
+          <p:cNvPr id="20" name="Shape 17"/>
           <p:cNvSpPr/>
           <p:nvPr/>
         </p:nvSpPr>
@@ -21547,7 +21811,7 @@
       </p:sp>
       <p:sp>
         <p:nvSpPr>
-          <p:cNvPr id="20" name="Shape 18"/>
+          <p:cNvPr id="21" name="Shape 18"/>
           <p:cNvSpPr/>
           <p:nvPr/>
         </p:nvSpPr>
@@ -21572,7 +21836,7 @@
       </p:sp>
       <p:sp>
         <p:nvSpPr>
-          <p:cNvPr id="21" name="Text 19"/>
+          <p:cNvPr id="22" name="Text 19"/>
           <p:cNvSpPr txBox="1"/>
           <p:nvPr/>
         </p:nvSpPr>
@@ -21613,7 +21877,7 @@
       </p:sp>
       <p:sp>
         <p:nvSpPr>
-          <p:cNvPr id="22" name="Text 20"/>
+          <p:cNvPr id="23" name="Text 20"/>
           <p:cNvSpPr txBox="1"/>
           <p:nvPr/>
         </p:nvSpPr>
@@ -21654,7 +21918,7 @@
       </p:sp>
       <p:sp>
         <p:nvSpPr>
-          <p:cNvPr id="23" name="Text 21"/>
+          <p:cNvPr id="24" name="Text 21"/>
           <p:cNvSpPr txBox="1"/>
           <p:nvPr/>
         </p:nvSpPr>
@@ -21695,7 +21959,7 @@
       </p:sp>
       <p:sp>
         <p:nvSpPr>
-          <p:cNvPr id="24" name="Shape 22"/>
+          <p:cNvPr id="25" name="Shape 22"/>
           <p:cNvSpPr/>
           <p:nvPr/>
         </p:nvSpPr>
@@ -21722,7 +21986,7 @@
       </p:sp>
       <p:sp>
         <p:nvSpPr>
-          <p:cNvPr id="25" name="Shape 23"/>
+          <p:cNvPr id="26" name="Shape 23"/>
           <p:cNvSpPr/>
           <p:nvPr/>
         </p:nvSpPr>
@@ -21747,7 +22011,7 @@
       </p:sp>
       <p:sp>
         <p:nvSpPr>
-          <p:cNvPr id="26" name="Text 24"/>
+          <p:cNvPr id="27" name="Text 24"/>
           <p:cNvSpPr txBox="1"/>
           <p:nvPr/>
         </p:nvSpPr>
@@ -21788,7 +22052,7 @@
       </p:sp>
       <p:sp>
         <p:nvSpPr>
-          <p:cNvPr id="27" name="Text 25"/>
+          <p:cNvPr id="28" name="Text 25"/>
           <p:cNvSpPr txBox="1"/>
           <p:nvPr/>
         </p:nvSpPr>
@@ -21829,7 +22093,7 @@
       </p:sp>
       <p:sp>
         <p:nvSpPr>
-          <p:cNvPr id="28" name="Text 26"/>
+          <p:cNvPr id="29" name="Text 26"/>
           <p:cNvSpPr txBox="1"/>
           <p:nvPr/>
         </p:nvSpPr>
@@ -21870,7 +22134,7 @@
       </p:sp>
       <p:sp>
         <p:nvSpPr>
-          <p:cNvPr id="29" name="Shape 27"/>
+          <p:cNvPr id="30" name="Shape 27"/>
           <p:cNvSpPr/>
           <p:nvPr/>
         </p:nvSpPr>
@@ -21897,7 +22161,7 @@
       </p:sp>
       <p:sp>
         <p:nvSpPr>
-          <p:cNvPr id="30" name="Shape 28"/>
+          <p:cNvPr id="31" name="Shape 28"/>
           <p:cNvSpPr/>
           <p:nvPr/>
         </p:nvSpPr>
@@ -21922,7 +22186,7 @@
       </p:sp>
       <p:sp>
         <p:nvSpPr>
-          <p:cNvPr id="31" name="Text 29"/>
+          <p:cNvPr id="32" name="Text 29"/>
           <p:cNvSpPr txBox="1"/>
           <p:nvPr/>
         </p:nvSpPr>
@@ -21963,7 +22227,7 @@
       </p:sp>
       <p:sp>
         <p:nvSpPr>
-          <p:cNvPr id="32" name="Text 30"/>
+          <p:cNvPr id="33" name="Text 30"/>
           <p:cNvSpPr txBox="1"/>
           <p:nvPr/>
         </p:nvSpPr>
@@ -22004,7 +22268,7 @@
       </p:sp>
       <p:sp>
         <p:nvSpPr>
-          <p:cNvPr id="33" name="Text 31"/>
+          <p:cNvPr id="34" name="Text 31"/>
           <p:cNvSpPr txBox="1"/>
           <p:nvPr/>
         </p:nvSpPr>
@@ -22045,7 +22309,7 @@
       </p:sp>
       <p:sp>
         <p:nvSpPr>
-          <p:cNvPr id="34" name="Text 32"/>
+          <p:cNvPr id="35" name="Text 32"/>
           <p:cNvSpPr txBox="1"/>
           <p:nvPr/>
         </p:nvSpPr>
@@ -22116,16 +22380,40 @@
           <a:chExt cx="0" cy="0"/>
         </a:xfrm>
       </p:grpSpPr>
-      <p:sp>
-        <p:nvSpPr>
-          <p:cNvPr id="2" name="Text 0"/>
+      <p:pic>
+        <p:nvPicPr>
+          <p:cNvPr id="2" name="Image 0" descr="preencoded.png">    </p:cNvPr>
+          <p:cNvPicPr>
+            <a:picLocks noChangeAspect="1"/>
+          </p:cNvPicPr>
+          <p:nvPr/>
+        </p:nvPicPr>
+        <p:blipFill>
+          <a:blip r:embed="rId1"/>
+          <a:stretch>
+            <a:fillRect/>
+          </a:stretch>
+        </p:blipFill>
+        <p:spPr>
+          <a:xfrm>
+            <a:off x="8211312" y="201168"/>
+            <a:ext cx="457200" cy="539496"/>
+          </a:xfrm>
+          <a:prstGeom prst="rect">
+            <a:avLst/>
+          </a:prstGeom>
+        </p:spPr>
+      </p:pic>
+      <p:sp>
+        <p:nvSpPr>
+          <p:cNvPr id="3" name="Text 0"/>
           <p:cNvSpPr txBox="1"/>
           <p:nvPr/>
         </p:nvSpPr>
         <p:spPr>
           <a:xfrm>
             <a:off x="457200" y="274320"/>
-            <a:ext cx="8229600" cy="548640"/>
+            <a:ext cx="7680960" cy="548640"/>
           </a:xfrm>
           <a:prstGeom prst="rect">
             <a:avLst/>
@@ -22159,7 +22447,7 @@
       </p:sp>
       <p:sp>
         <p:nvSpPr>
-          <p:cNvPr id="3" name="Text 1"/>
+          <p:cNvPr id="4" name="Text 1"/>
           <p:cNvSpPr txBox="1"/>
           <p:nvPr/>
         </p:nvSpPr>
@@ -22200,7 +22488,7 @@
       </p:sp>
       <p:graphicFrame>
         <p:nvGraphicFramePr>
-          <p:cNvPr id="4" name="Chart 0" descr=""/>
+          <p:cNvPr id="5" name="Chart 0" descr=""/>
           <p:cNvGraphicFramePr/>
           <p:nvPr/>
         </p:nvGraphicFramePr>
@@ -22210,13 +22498,13 @@
         </p:xfrm>
         <a:graphic xmlns:a="http://schemas.openxmlformats.org/drawingml/2006/main">
           <a:graphicData uri="http://schemas.openxmlformats.org/drawingml/2006/chart">
-            <c:chart xmlns:c="http://schemas.openxmlformats.org/drawingml/2006/chart" r:id="rId1"/>
+            <c:chart xmlns:c="http://schemas.openxmlformats.org/drawingml/2006/chart" r:id="rId2"/>
           </a:graphicData>
         </a:graphic>
       </p:graphicFrame>
       <p:sp>
         <p:nvSpPr>
-          <p:cNvPr id="5" name="Shape 2"/>
+          <p:cNvPr id="6" name="Shape 2"/>
           <p:cNvSpPr/>
           <p:nvPr/>
         </p:nvSpPr>
@@ -22243,7 +22531,7 @@
       </p:sp>
       <p:sp>
         <p:nvSpPr>
-          <p:cNvPr id="6" name="Text 3"/>
+          <p:cNvPr id="7" name="Text 3"/>
           <p:cNvSpPr txBox="1"/>
           <p:nvPr/>
         </p:nvSpPr>
@@ -22284,7 +22572,7 @@
       </p:sp>
       <p:sp>
         <p:nvSpPr>
-          <p:cNvPr id="7" name="Text 4"/>
+          <p:cNvPr id="8" name="Text 4"/>
           <p:cNvSpPr txBox="1"/>
           <p:nvPr/>
         </p:nvSpPr>
@@ -22325,7 +22613,7 @@
       </p:sp>
       <p:sp>
         <p:nvSpPr>
-          <p:cNvPr id="8" name="Shape 5"/>
+          <p:cNvPr id="9" name="Shape 5"/>
           <p:cNvSpPr/>
           <p:nvPr/>
         </p:nvSpPr>
@@ -22352,7 +22640,7 @@
       </p:sp>
       <p:sp>
         <p:nvSpPr>
-          <p:cNvPr id="9" name="Text 6"/>
+          <p:cNvPr id="10" name="Text 6"/>
           <p:cNvSpPr txBox="1"/>
           <p:nvPr/>
         </p:nvSpPr>
@@ -22393,7 +22681,7 @@
       </p:sp>
       <p:sp>
         <p:nvSpPr>
-          <p:cNvPr id="10" name="Text 7"/>
+          <p:cNvPr id="11" name="Text 7"/>
           <p:cNvSpPr txBox="1"/>
           <p:nvPr/>
         </p:nvSpPr>
@@ -22434,7 +22722,7 @@
       </p:sp>
       <p:sp>
         <p:nvSpPr>
-          <p:cNvPr id="11" name="Shape 8"/>
+          <p:cNvPr id="12" name="Shape 8"/>
           <p:cNvSpPr/>
           <p:nvPr/>
         </p:nvSpPr>
@@ -22461,7 +22749,7 @@
       </p:sp>
       <p:sp>
         <p:nvSpPr>
-          <p:cNvPr id="12" name="Text 9"/>
+          <p:cNvPr id="13" name="Text 9"/>
           <p:cNvSpPr txBox="1"/>
           <p:nvPr/>
         </p:nvSpPr>
@@ -22502,7 +22790,7 @@
       </p:sp>
       <p:sp>
         <p:nvSpPr>
-          <p:cNvPr id="13" name="Text 10"/>
+          <p:cNvPr id="14" name="Text 10"/>
           <p:cNvSpPr txBox="1"/>
           <p:nvPr/>
         </p:nvSpPr>
@@ -22543,7 +22831,7 @@
       </p:sp>
       <p:sp>
         <p:nvSpPr>
-          <p:cNvPr id="14" name="Shape 11"/>
+          <p:cNvPr id="15" name="Shape 11"/>
           <p:cNvSpPr/>
           <p:nvPr/>
         </p:nvSpPr>
@@ -22570,7 +22858,7 @@
       </p:sp>
       <p:sp>
         <p:nvSpPr>
-          <p:cNvPr id="15" name="Text 12"/>
+          <p:cNvPr id="16" name="Text 12"/>
           <p:cNvSpPr txBox="1"/>
           <p:nvPr/>
         </p:nvSpPr>
@@ -22611,7 +22899,7 @@
       </p:sp>
       <p:sp>
         <p:nvSpPr>
-          <p:cNvPr id="16" name="Text 13"/>
+          <p:cNvPr id="17" name="Text 13"/>
           <p:cNvSpPr txBox="1"/>
           <p:nvPr/>
         </p:nvSpPr>
@@ -22652,7 +22940,7 @@
       </p:sp>
       <p:sp>
         <p:nvSpPr>
-          <p:cNvPr id="17" name="Text 14"/>
+          <p:cNvPr id="18" name="Text 14"/>
           <p:cNvSpPr txBox="1"/>
           <p:nvPr/>
         </p:nvSpPr>
@@ -22693,7 +22981,7 @@
       </p:sp>
       <p:sp>
         <p:nvSpPr>
-          <p:cNvPr id="18" name="Text 15"/>
+          <p:cNvPr id="19" name="Text 15"/>
           <p:cNvSpPr txBox="1"/>
           <p:nvPr/>
         </p:nvSpPr>
@@ -22764,16 +23052,40 @@
           <a:chExt cx="0" cy="0"/>
         </a:xfrm>
       </p:grpSpPr>
-      <p:sp>
-        <p:nvSpPr>
-          <p:cNvPr id="2" name="Text 0"/>
+      <p:pic>
+        <p:nvPicPr>
+          <p:cNvPr id="2" name="Image 0" descr="preencoded.png">    </p:cNvPr>
+          <p:cNvPicPr>
+            <a:picLocks noChangeAspect="1"/>
+          </p:cNvPicPr>
+          <p:nvPr/>
+        </p:nvPicPr>
+        <p:blipFill>
+          <a:blip r:embed="rId1"/>
+          <a:stretch>
+            <a:fillRect/>
+          </a:stretch>
+        </p:blipFill>
+        <p:spPr>
+          <a:xfrm>
+            <a:off x="8211312" y="201168"/>
+            <a:ext cx="457200" cy="539496"/>
+          </a:xfrm>
+          <a:prstGeom prst="rect">
+            <a:avLst/>
+          </a:prstGeom>
+        </p:spPr>
+      </p:pic>
+      <p:sp>
+        <p:nvSpPr>
+          <p:cNvPr id="3" name="Text 0"/>
           <p:cNvSpPr txBox="1"/>
           <p:nvPr/>
         </p:nvSpPr>
         <p:spPr>
           <a:xfrm>
             <a:off x="457200" y="274320"/>
-            <a:ext cx="8229600" cy="548640"/>
+            <a:ext cx="7680960" cy="548640"/>
           </a:xfrm>
           <a:prstGeom prst="rect">
             <a:avLst/>
@@ -22807,7 +23119,7 @@
       </p:sp>
       <p:sp>
         <p:nvSpPr>
-          <p:cNvPr id="3" name="Text 1"/>
+          <p:cNvPr id="4" name="Text 1"/>
           <p:cNvSpPr txBox="1"/>
           <p:nvPr/>
         </p:nvSpPr>
@@ -22848,7 +23160,7 @@
       </p:sp>
       <p:graphicFrame>
         <p:nvGraphicFramePr>
-          <p:cNvPr id="4" name="Chart 0" descr=""/>
+          <p:cNvPr id="5" name="Chart 0" descr=""/>
           <p:cNvGraphicFramePr/>
           <p:nvPr/>
         </p:nvGraphicFramePr>
@@ -22858,13 +23170,13 @@
         </p:xfrm>
         <a:graphic xmlns:a="http://schemas.openxmlformats.org/drawingml/2006/main">
           <a:graphicData uri="http://schemas.openxmlformats.org/drawingml/2006/chart">
-            <c:chart xmlns:c="http://schemas.openxmlformats.org/drawingml/2006/chart" r:id="rId1"/>
+            <c:chart xmlns:c="http://schemas.openxmlformats.org/drawingml/2006/chart" r:id="rId2"/>
           </a:graphicData>
         </a:graphic>
       </p:graphicFrame>
       <p:sp>
         <p:nvSpPr>
-          <p:cNvPr id="5" name="Shape 2"/>
+          <p:cNvPr id="6" name="Shape 2"/>
           <p:cNvSpPr/>
           <p:nvPr/>
         </p:nvSpPr>
@@ -22891,7 +23203,7 @@
       </p:sp>
       <p:sp>
         <p:nvSpPr>
-          <p:cNvPr id="6" name="Text 3"/>
+          <p:cNvPr id="7" name="Text 3"/>
           <p:cNvSpPr txBox="1"/>
           <p:nvPr/>
         </p:nvSpPr>
@@ -22932,7 +23244,7 @@
       </p:sp>
       <p:sp>
         <p:nvSpPr>
-          <p:cNvPr id="7" name="Text 4"/>
+          <p:cNvPr id="8" name="Text 4"/>
           <p:cNvSpPr txBox="1"/>
           <p:nvPr/>
         </p:nvSpPr>
@@ -23040,7 +23352,7 @@
       </p:sp>
       <p:sp>
         <p:nvSpPr>
-          <p:cNvPr id="8" name="Text 5"/>
+          <p:cNvPr id="9" name="Text 5"/>
           <p:cNvSpPr txBox="1"/>
           <p:nvPr/>
         </p:nvSpPr>
@@ -23081,7 +23393,7 @@
       </p:sp>
       <p:sp>
         <p:nvSpPr>
-          <p:cNvPr id="9" name="Text 6"/>
+          <p:cNvPr id="10" name="Text 6"/>
           <p:cNvSpPr txBox="1"/>
           <p:nvPr/>
         </p:nvSpPr>
@@ -23152,16 +23464,40 @@
           <a:chExt cx="0" cy="0"/>
         </a:xfrm>
       </p:grpSpPr>
-      <p:sp>
-        <p:nvSpPr>
-          <p:cNvPr id="2" name="Text 0"/>
+      <p:pic>
+        <p:nvPicPr>
+          <p:cNvPr id="2" name="Image 0" descr="preencoded.png">    </p:cNvPr>
+          <p:cNvPicPr>
+            <a:picLocks noChangeAspect="1"/>
+          </p:cNvPicPr>
+          <p:nvPr/>
+        </p:nvPicPr>
+        <p:blipFill>
+          <a:blip r:embed="rId1"/>
+          <a:stretch>
+            <a:fillRect/>
+          </a:stretch>
+        </p:blipFill>
+        <p:spPr>
+          <a:xfrm>
+            <a:off x="8211312" y="201168"/>
+            <a:ext cx="457200" cy="539496"/>
+          </a:xfrm>
+          <a:prstGeom prst="rect">
+            <a:avLst/>
+          </a:prstGeom>
+        </p:spPr>
+      </p:pic>
+      <p:sp>
+        <p:nvSpPr>
+          <p:cNvPr id="3" name="Text 0"/>
           <p:cNvSpPr txBox="1"/>
           <p:nvPr/>
         </p:nvSpPr>
         <p:spPr>
           <a:xfrm>
             <a:off x="457200" y="274320"/>
-            <a:ext cx="8229600" cy="548640"/>
+            <a:ext cx="7680960" cy="548640"/>
           </a:xfrm>
           <a:prstGeom prst="rect">
             <a:avLst/>
@@ -23195,7 +23531,7 @@
       </p:sp>
       <p:sp>
         <p:nvSpPr>
-          <p:cNvPr id="3" name="Text 1"/>
+          <p:cNvPr id="4" name="Text 1"/>
           <p:cNvSpPr txBox="1"/>
           <p:nvPr/>
         </p:nvSpPr>
@@ -23236,7 +23572,7 @@
       </p:sp>
       <p:graphicFrame>
         <p:nvGraphicFramePr>
-          <p:cNvPr id="4" name="Chart 0" descr=""/>
+          <p:cNvPr id="5" name="Chart 0" descr=""/>
           <p:cNvGraphicFramePr/>
           <p:nvPr/>
         </p:nvGraphicFramePr>
@@ -23246,13 +23582,13 @@
         </p:xfrm>
         <a:graphic xmlns:a="http://schemas.openxmlformats.org/drawingml/2006/main">
           <a:graphicData uri="http://schemas.openxmlformats.org/drawingml/2006/chart">
-            <c:chart xmlns:c="http://schemas.openxmlformats.org/drawingml/2006/chart" r:id="rId1"/>
+            <c:chart xmlns:c="http://schemas.openxmlformats.org/drawingml/2006/chart" r:id="rId2"/>
           </a:graphicData>
         </a:graphic>
       </p:graphicFrame>
       <p:sp>
         <p:nvSpPr>
-          <p:cNvPr id="5" name="Shape 2"/>
+          <p:cNvPr id="6" name="Shape 2"/>
           <p:cNvSpPr/>
           <p:nvPr/>
         </p:nvSpPr>
@@ -23279,7 +23615,7 @@
       </p:sp>
       <p:sp>
         <p:nvSpPr>
-          <p:cNvPr id="6" name="Text 3"/>
+          <p:cNvPr id="7" name="Text 3"/>
           <p:cNvSpPr txBox="1"/>
           <p:nvPr/>
         </p:nvSpPr>
@@ -23320,7 +23656,7 @@
       </p:sp>
       <p:sp>
         <p:nvSpPr>
-          <p:cNvPr id="7" name="Text 4"/>
+          <p:cNvPr id="8" name="Text 4"/>
           <p:cNvSpPr txBox="1"/>
           <p:nvPr/>
         </p:nvSpPr>
@@ -23449,7 +23785,7 @@
       </p:sp>
       <p:sp>
         <p:nvSpPr>
-          <p:cNvPr id="8" name="Text 5"/>
+          <p:cNvPr id="9" name="Text 5"/>
           <p:cNvSpPr txBox="1"/>
           <p:nvPr/>
         </p:nvSpPr>
@@ -23490,7 +23826,7 @@
       </p:sp>
       <p:sp>
         <p:nvSpPr>
-          <p:cNvPr id="9" name="Text 6"/>
+          <p:cNvPr id="10" name="Text 6"/>
           <p:cNvSpPr txBox="1"/>
           <p:nvPr/>
         </p:nvSpPr>
@@ -23561,16 +23897,40 @@
           <a:chExt cx="0" cy="0"/>
         </a:xfrm>
       </p:grpSpPr>
-      <p:sp>
-        <p:nvSpPr>
-          <p:cNvPr id="2" name="Text 0"/>
+      <p:pic>
+        <p:nvPicPr>
+          <p:cNvPr id="2" name="Image 0" descr="preencoded.png">    </p:cNvPr>
+          <p:cNvPicPr>
+            <a:picLocks noChangeAspect="1"/>
+          </p:cNvPicPr>
+          <p:nvPr/>
+        </p:nvPicPr>
+        <p:blipFill>
+          <a:blip r:embed="rId1"/>
+          <a:stretch>
+            <a:fillRect/>
+          </a:stretch>
+        </p:blipFill>
+        <p:spPr>
+          <a:xfrm>
+            <a:off x="8211312" y="201168"/>
+            <a:ext cx="457200" cy="539496"/>
+          </a:xfrm>
+          <a:prstGeom prst="rect">
+            <a:avLst/>
+          </a:prstGeom>
+        </p:spPr>
+      </p:pic>
+      <p:sp>
+        <p:nvSpPr>
+          <p:cNvPr id="3" name="Text 0"/>
           <p:cNvSpPr txBox="1"/>
           <p:nvPr/>
         </p:nvSpPr>
         <p:spPr>
           <a:xfrm>
             <a:off x="457200" y="274320"/>
-            <a:ext cx="8229600" cy="548640"/>
+            <a:ext cx="7680960" cy="548640"/>
           </a:xfrm>
           <a:prstGeom prst="rect">
             <a:avLst/>
@@ -23604,7 +23964,7 @@
       </p:sp>
       <p:sp>
         <p:nvSpPr>
-          <p:cNvPr id="3" name="Text 1"/>
+          <p:cNvPr id="4" name="Text 1"/>
           <p:cNvSpPr txBox="1"/>
           <p:nvPr/>
         </p:nvSpPr>
@@ -23645,7 +24005,7 @@
       </p:sp>
       <p:sp>
         <p:nvSpPr>
-          <p:cNvPr id="4" name="Shape 2"/>
+          <p:cNvPr id="5" name="Shape 2"/>
           <p:cNvSpPr/>
           <p:nvPr/>
         </p:nvSpPr>
@@ -23672,7 +24032,7 @@
       </p:sp>
       <p:sp>
         <p:nvSpPr>
-          <p:cNvPr id="5" name="Text 3"/>
+          <p:cNvPr id="6" name="Text 3"/>
           <p:cNvSpPr txBox="1"/>
           <p:nvPr/>
         </p:nvSpPr>
@@ -23713,7 +24073,7 @@
       </p:sp>
       <p:sp>
         <p:nvSpPr>
-          <p:cNvPr id="6" name="Text 4"/>
+          <p:cNvPr id="7" name="Text 4"/>
           <p:cNvSpPr txBox="1"/>
           <p:nvPr/>
         </p:nvSpPr>
@@ -23821,7 +24181,7 @@
       </p:sp>
       <p:sp>
         <p:nvSpPr>
-          <p:cNvPr id="7" name="Text 5"/>
+          <p:cNvPr id="8" name="Text 5"/>
           <p:cNvSpPr txBox="1"/>
           <p:nvPr/>
         </p:nvSpPr>
@@ -23862,7 +24222,7 @@
       </p:sp>
       <p:graphicFrame>
         <p:nvGraphicFramePr>
-          <p:cNvPr id="8" name="Chart 0" descr=""/>
+          <p:cNvPr id="9" name="Chart 0" descr=""/>
           <p:cNvGraphicFramePr/>
           <p:nvPr/>
         </p:nvGraphicFramePr>
@@ -23872,13 +24232,13 @@
         </p:xfrm>
         <a:graphic xmlns:a="http://schemas.openxmlformats.org/drawingml/2006/main">
           <a:graphicData uri="http://schemas.openxmlformats.org/drawingml/2006/chart">
-            <c:chart xmlns:c="http://schemas.openxmlformats.org/drawingml/2006/chart" r:id="rId1"/>
+            <c:chart xmlns:c="http://schemas.openxmlformats.org/drawingml/2006/chart" r:id="rId2"/>
           </a:graphicData>
         </a:graphic>
       </p:graphicFrame>
       <p:sp>
         <p:nvSpPr>
-          <p:cNvPr id="9" name="Text 6"/>
+          <p:cNvPr id="10" name="Text 6"/>
           <p:cNvSpPr txBox="1"/>
           <p:nvPr/>
         </p:nvSpPr>
@@ -23919,7 +24279,7 @@
       </p:sp>
       <p:sp>
         <p:nvSpPr>
-          <p:cNvPr id="10" name="Text 7"/>
+          <p:cNvPr id="11" name="Text 7"/>
           <p:cNvSpPr txBox="1"/>
           <p:nvPr/>
         </p:nvSpPr>
@@ -23990,16 +24350,40 @@
           <a:chExt cx="0" cy="0"/>
         </a:xfrm>
       </p:grpSpPr>
-      <p:sp>
-        <p:nvSpPr>
-          <p:cNvPr id="2" name="Text 0"/>
+      <p:pic>
+        <p:nvPicPr>
+          <p:cNvPr id="2" name="Image 0" descr="preencoded.png">    </p:cNvPr>
+          <p:cNvPicPr>
+            <a:picLocks noChangeAspect="1"/>
+          </p:cNvPicPr>
+          <p:nvPr/>
+        </p:nvPicPr>
+        <p:blipFill>
+          <a:blip r:embed="rId1"/>
+          <a:stretch>
+            <a:fillRect/>
+          </a:stretch>
+        </p:blipFill>
+        <p:spPr>
+          <a:xfrm>
+            <a:off x="8211312" y="201168"/>
+            <a:ext cx="457200" cy="539496"/>
+          </a:xfrm>
+          <a:prstGeom prst="rect">
+            <a:avLst/>
+          </a:prstGeom>
+        </p:spPr>
+      </p:pic>
+      <p:sp>
+        <p:nvSpPr>
+          <p:cNvPr id="3" name="Text 0"/>
           <p:cNvSpPr txBox="1"/>
           <p:nvPr/>
         </p:nvSpPr>
         <p:spPr>
           <a:xfrm>
             <a:off x="457200" y="274320"/>
-            <a:ext cx="8229600" cy="548640"/>
+            <a:ext cx="7680960" cy="548640"/>
           </a:xfrm>
           <a:prstGeom prst="rect">
             <a:avLst/>
@@ -24033,7 +24417,7 @@
       </p:sp>
       <p:sp>
         <p:nvSpPr>
-          <p:cNvPr id="3" name="Text 1"/>
+          <p:cNvPr id="4" name="Text 1"/>
           <p:cNvSpPr txBox="1"/>
           <p:nvPr/>
         </p:nvSpPr>
@@ -24074,7 +24458,7 @@
       </p:sp>
       <p:sp>
         <p:nvSpPr>
-          <p:cNvPr id="4" name="Shape 2"/>
+          <p:cNvPr id="5" name="Shape 2"/>
           <p:cNvSpPr/>
           <p:nvPr/>
         </p:nvSpPr>
@@ -24099,7 +24483,7 @@
       </p:sp>
       <p:sp>
         <p:nvSpPr>
-          <p:cNvPr id="5" name="Text 3"/>
+          <p:cNvPr id="6" name="Text 3"/>
           <p:cNvSpPr txBox="1"/>
           <p:nvPr/>
         </p:nvSpPr>
@@ -24140,7 +24524,7 @@
       </p:sp>
       <p:sp>
         <p:nvSpPr>
-          <p:cNvPr id="6" name="Text 4"/>
+          <p:cNvPr id="7" name="Text 4"/>
           <p:cNvSpPr txBox="1"/>
           <p:nvPr/>
         </p:nvSpPr>
@@ -24181,7 +24565,7 @@
       </p:sp>
       <p:sp>
         <p:nvSpPr>
-          <p:cNvPr id="7" name="Text 5"/>
+          <p:cNvPr id="8" name="Text 5"/>
           <p:cNvSpPr txBox="1"/>
           <p:nvPr/>
         </p:nvSpPr>
@@ -24222,7 +24606,7 @@
       </p:sp>
       <p:sp>
         <p:nvSpPr>
-          <p:cNvPr id="8" name="Shape 6"/>
+          <p:cNvPr id="9" name="Shape 6"/>
           <p:cNvSpPr/>
           <p:nvPr/>
         </p:nvSpPr>
@@ -24247,7 +24631,7 @@
       </p:sp>
       <p:sp>
         <p:nvSpPr>
-          <p:cNvPr id="9" name="Text 7"/>
+          <p:cNvPr id="10" name="Text 7"/>
           <p:cNvSpPr txBox="1"/>
           <p:nvPr/>
         </p:nvSpPr>
@@ -24288,7 +24672,7 @@
       </p:sp>
       <p:sp>
         <p:nvSpPr>
-          <p:cNvPr id="10" name="Text 8"/>
+          <p:cNvPr id="11" name="Text 8"/>
           <p:cNvSpPr txBox="1"/>
           <p:nvPr/>
         </p:nvSpPr>
@@ -24329,7 +24713,7 @@
       </p:sp>
       <p:sp>
         <p:nvSpPr>
-          <p:cNvPr id="11" name="Text 9"/>
+          <p:cNvPr id="12" name="Text 9"/>
           <p:cNvSpPr txBox="1"/>
           <p:nvPr/>
         </p:nvSpPr>
@@ -24370,7 +24754,7 @@
       </p:sp>
       <p:sp>
         <p:nvSpPr>
-          <p:cNvPr id="12" name="Shape 10"/>
+          <p:cNvPr id="13" name="Shape 10"/>
           <p:cNvSpPr/>
           <p:nvPr/>
         </p:nvSpPr>
@@ -24395,7 +24779,7 @@
       </p:sp>
       <p:sp>
         <p:nvSpPr>
-          <p:cNvPr id="13" name="Text 11"/>
+          <p:cNvPr id="14" name="Text 11"/>
           <p:cNvSpPr txBox="1"/>
           <p:nvPr/>
         </p:nvSpPr>
@@ -24436,7 +24820,7 @@
       </p:sp>
       <p:sp>
         <p:nvSpPr>
-          <p:cNvPr id="14" name="Text 12"/>
+          <p:cNvPr id="15" name="Text 12"/>
           <p:cNvSpPr txBox="1"/>
           <p:nvPr/>
         </p:nvSpPr>
@@ -24477,7 +24861,7 @@
       </p:sp>
       <p:sp>
         <p:nvSpPr>
-          <p:cNvPr id="15" name="Text 13"/>
+          <p:cNvPr id="16" name="Text 13"/>
           <p:cNvSpPr txBox="1"/>
           <p:nvPr/>
         </p:nvSpPr>
@@ -24518,7 +24902,7 @@
       </p:sp>
       <p:sp>
         <p:nvSpPr>
-          <p:cNvPr id="16" name="Shape 14"/>
+          <p:cNvPr id="17" name="Shape 14"/>
           <p:cNvSpPr/>
           <p:nvPr/>
         </p:nvSpPr>
@@ -24543,7 +24927,7 @@
       </p:sp>
       <p:sp>
         <p:nvSpPr>
-          <p:cNvPr id="17" name="Text 15"/>
+          <p:cNvPr id="18" name="Text 15"/>
           <p:cNvSpPr txBox="1"/>
           <p:nvPr/>
         </p:nvSpPr>
@@ -24584,7 +24968,7 @@
       </p:sp>
       <p:sp>
         <p:nvSpPr>
-          <p:cNvPr id="18" name="Text 16"/>
+          <p:cNvPr id="19" name="Text 16"/>
           <p:cNvSpPr txBox="1"/>
           <p:nvPr/>
         </p:nvSpPr>
@@ -24625,7 +25009,7 @@
       </p:sp>
       <p:sp>
         <p:nvSpPr>
-          <p:cNvPr id="19" name="Text 17"/>
+          <p:cNvPr id="20" name="Text 17"/>
           <p:cNvSpPr txBox="1"/>
           <p:nvPr/>
         </p:nvSpPr>
@@ -24666,7 +25050,7 @@
       </p:sp>
       <p:sp>
         <p:nvSpPr>
-          <p:cNvPr id="20" name="Shape 18"/>
+          <p:cNvPr id="21" name="Shape 18"/>
           <p:cNvSpPr/>
           <p:nvPr/>
         </p:nvSpPr>
@@ -24691,7 +25075,7 @@
       </p:sp>
       <p:sp>
         <p:nvSpPr>
-          <p:cNvPr id="21" name="Text 19"/>
+          <p:cNvPr id="22" name="Text 19"/>
           <p:cNvSpPr txBox="1"/>
           <p:nvPr/>
         </p:nvSpPr>
@@ -24732,7 +25116,7 @@
       </p:sp>
       <p:sp>
         <p:nvSpPr>
-          <p:cNvPr id="22" name="Text 20"/>
+          <p:cNvPr id="23" name="Text 20"/>
           <p:cNvSpPr txBox="1"/>
           <p:nvPr/>
         </p:nvSpPr>
@@ -24773,7 +25157,7 @@
       </p:sp>
       <p:sp>
         <p:nvSpPr>
-          <p:cNvPr id="23" name="Text 21"/>
+          <p:cNvPr id="24" name="Text 21"/>
           <p:cNvSpPr txBox="1"/>
           <p:nvPr/>
         </p:nvSpPr>
@@ -24814,7 +25198,7 @@
       </p:sp>
       <p:sp>
         <p:nvSpPr>
-          <p:cNvPr id="24" name="Shape 22"/>
+          <p:cNvPr id="25" name="Shape 22"/>
           <p:cNvSpPr/>
           <p:nvPr/>
         </p:nvSpPr>
@@ -24839,7 +25223,7 @@
       </p:sp>
       <p:sp>
         <p:nvSpPr>
-          <p:cNvPr id="25" name="Text 23"/>
+          <p:cNvPr id="26" name="Text 23"/>
           <p:cNvSpPr txBox="1"/>
           <p:nvPr/>
         </p:nvSpPr>
@@ -24880,7 +25264,7 @@
       </p:sp>
       <p:sp>
         <p:nvSpPr>
-          <p:cNvPr id="26" name="Text 24"/>
+          <p:cNvPr id="27" name="Text 24"/>
           <p:cNvSpPr txBox="1"/>
           <p:nvPr/>
         </p:nvSpPr>
@@ -24921,7 +25305,7 @@
       </p:sp>
       <p:sp>
         <p:nvSpPr>
-          <p:cNvPr id="27" name="Text 25"/>
+          <p:cNvPr id="28" name="Text 25"/>
           <p:cNvSpPr txBox="1"/>
           <p:nvPr/>
         </p:nvSpPr>
@@ -24962,7 +25346,7 @@
       </p:sp>
       <p:sp>
         <p:nvSpPr>
-          <p:cNvPr id="28" name="Text 26"/>
+          <p:cNvPr id="29" name="Text 26"/>
           <p:cNvSpPr txBox="1"/>
           <p:nvPr/>
         </p:nvSpPr>
@@ -25003,7 +25387,7 @@
       </p:sp>
       <p:sp>
         <p:nvSpPr>
-          <p:cNvPr id="29" name="Text 27"/>
+          <p:cNvPr id="30" name="Text 27"/>
           <p:cNvSpPr txBox="1"/>
           <p:nvPr/>
         </p:nvSpPr>
@@ -25074,16 +25458,40 @@
           <a:chExt cx="0" cy="0"/>
         </a:xfrm>
       </p:grpSpPr>
-      <p:sp>
-        <p:nvSpPr>
-          <p:cNvPr id="2" name="Text 0"/>
+      <p:pic>
+        <p:nvPicPr>
+          <p:cNvPr id="2" name="Image 0" descr="preencoded.png">    </p:cNvPr>
+          <p:cNvPicPr>
+            <a:picLocks noChangeAspect="1"/>
+          </p:cNvPicPr>
+          <p:nvPr/>
+        </p:nvPicPr>
+        <p:blipFill>
+          <a:blip r:embed="rId1"/>
+          <a:stretch>
+            <a:fillRect/>
+          </a:stretch>
+        </p:blipFill>
+        <p:spPr>
+          <a:xfrm>
+            <a:off x="8211312" y="201168"/>
+            <a:ext cx="457200" cy="539496"/>
+          </a:xfrm>
+          <a:prstGeom prst="rect">
+            <a:avLst/>
+          </a:prstGeom>
+        </p:spPr>
+      </p:pic>
+      <p:sp>
+        <p:nvSpPr>
+          <p:cNvPr id="3" name="Text 0"/>
           <p:cNvSpPr txBox="1"/>
           <p:nvPr/>
         </p:nvSpPr>
         <p:spPr>
           <a:xfrm>
             <a:off x="457200" y="274320"/>
-            <a:ext cx="8229600" cy="548640"/>
+            <a:ext cx="7680960" cy="548640"/>
           </a:xfrm>
           <a:prstGeom prst="rect">
             <a:avLst/>
@@ -25117,7 +25525,7 @@
       </p:sp>
       <p:sp>
         <p:nvSpPr>
-          <p:cNvPr id="3" name="Text 1"/>
+          <p:cNvPr id="4" name="Text 1"/>
           <p:cNvSpPr txBox="1"/>
           <p:nvPr/>
         </p:nvSpPr>
@@ -28062,7 +28470,7 @@
       </p:graphicFrame>
       <p:graphicFrame>
         <p:nvGraphicFramePr>
-          <p:cNvPr id="5" name="Chart 0" descr=""/>
+          <p:cNvPr id="6" name="Chart 0" descr=""/>
           <p:cNvGraphicFramePr/>
           <p:nvPr/>
         </p:nvGraphicFramePr>
@@ -28072,13 +28480,13 @@
         </p:xfrm>
         <a:graphic xmlns:a="http://schemas.openxmlformats.org/drawingml/2006/main">
           <a:graphicData uri="http://schemas.openxmlformats.org/drawingml/2006/chart">
-            <c:chart xmlns:c="http://schemas.openxmlformats.org/drawingml/2006/chart" r:id="rId1"/>
+            <c:chart xmlns:c="http://schemas.openxmlformats.org/drawingml/2006/chart" r:id="rId2"/>
           </a:graphicData>
         </a:graphic>
       </p:graphicFrame>
       <p:sp>
         <p:nvSpPr>
-          <p:cNvPr id="6" name="Text 2"/>
+          <p:cNvPr id="7" name="Text 2"/>
           <p:cNvSpPr txBox="1"/>
           <p:nvPr/>
         </p:nvSpPr>
@@ -28119,7 +28527,7 @@
       </p:sp>
       <p:sp>
         <p:nvSpPr>
-          <p:cNvPr id="7" name="Text 3"/>
+          <p:cNvPr id="8" name="Text 3"/>
           <p:cNvSpPr txBox="1"/>
           <p:nvPr/>
         </p:nvSpPr>
